--- a/Pregrado/Trabajo de grado 2/Clases/Sesion 11 - Cierre del avance · preparación para TG3/Presentacion.pptx
+++ b/Pregrado/Trabajo de grado 2/Clases/Sesion 11 - Cierre del avance · preparación para TG3/Presentacion.pptx
@@ -3366,41 +3366,6 @@
           </a:p>
         </p:txBody>
       </p:sp>
-      <p:sp>
-        <p:nvSpPr>
-          <p:cNvPr id="7" name="TextBox 6"/>
-          <p:cNvSpPr txBox="1"/>
-          <p:nvPr/>
-        </p:nvSpPr>
-        <p:spPr>
-          <a:xfrm>
-            <a:off x="2194560" y="6446520"/>
-            <a:ext cx="5943600" cy="274320"/>
-          </a:xfrm>
-          <a:prstGeom prst="rect">
-            <a:avLst/>
-          </a:prstGeom>
-          <a:noFill/>
-        </p:spPr>
-        <p:txBody>
-          <a:bodyPr wrap="square" anchor="t" lIns="0" rIns="0" tIns="0" bIns="0">
-            <a:spAutoFit/>
-          </a:bodyPr>
-          <a:lstStyle/>
-          <a:p>
-            <a:pPr algn="l"/>
-            <a:r>
-              <a:rPr sz="1000" b="1" i="0">
-                <a:solidFill>
-                  <a:srgbClr val="8F989D"/>
-                </a:solidFill>
-                <a:latin typeface="Calibri"/>
-              </a:rPr>
-              <a:t>Inicio 5:10 pm</a:t>
-            </a:r>
-          </a:p>
-        </p:txBody>
-      </p:sp>
     </p:spTree>
   </p:cSld>
   <p:clrMapOvr>
@@ -3735,16 +3700,16 @@
                 </a:solidFill>
                 <a:latin typeface="Calibri"/>
               </a:rPr>
-              <a:t>Verificación antiplagio</a:t>
-            </a:r>
-            <a:r>
-              <a:rPr sz="1600" b="0" i="0">
-                <a:solidFill>
-                  <a:srgbClr val="2B2B2B"/>
-                </a:solidFill>
-                <a:latin typeface="Calibri"/>
-              </a:rPr>
-              <a:t> con la herramienta institucional del campus (</a:t>
+              <a:t>Revisión de similitud institucional</a:t>
+            </a:r>
+            <a:r>
+              <a:rPr sz="1600" b="0" i="0">
+                <a:solidFill>
+                  <a:srgbClr val="2B2B2B"/>
+                </a:solidFill>
+                <a:latin typeface="Calibri"/>
+              </a:rPr>
+              <a:t> en el aula de </a:t>
             </a:r>
             <a:r>
               <a:rPr sz="1600" b="1" i="0">
@@ -3762,7 +3727,7 @@
                 </a:solidFill>
                 <a:latin typeface="Calibri"/>
               </a:rPr>
-              <a:t>) y entrega al repositorio.</a:t>
+              <a:t> —el Docente de TG3 indica cómo opera— y entrega al repositorio.</a:t>
             </a:r>
           </a:p>
           <a:p>
@@ -3804,41 +3769,6 @@
       <p:sp>
         <p:nvSpPr>
           <p:cNvPr id="5" name="TextBox 4"/>
-          <p:cNvSpPr txBox="1"/>
-          <p:nvPr/>
-        </p:nvSpPr>
-        <p:spPr>
-          <a:xfrm>
-            <a:off x="2194560" y="6446520"/>
-            <a:ext cx="5943600" cy="274320"/>
-          </a:xfrm>
-          <a:prstGeom prst="rect">
-            <a:avLst/>
-          </a:prstGeom>
-          <a:noFill/>
-        </p:spPr>
-        <p:txBody>
-          <a:bodyPr wrap="square" anchor="t" lIns="0" rIns="0" tIns="0" bIns="0">
-            <a:spAutoFit/>
-          </a:bodyPr>
-          <a:lstStyle/>
-          <a:p>
-            <a:pPr algn="l"/>
-            <a:r>
-              <a:rPr sz="1000" b="1" i="0">
-                <a:solidFill>
-                  <a:srgbClr val="8F989D"/>
-                </a:solidFill>
-                <a:latin typeface="Calibri"/>
-              </a:rPr>
-              <a:t>Inicio 5:10 pm</a:t>
-            </a:r>
-          </a:p>
-        </p:txBody>
-      </p:sp>
-      <p:sp>
-        <p:nvSpPr>
-          <p:cNvPr id="6" name="TextBox 5"/>
           <p:cNvSpPr txBox="1"/>
           <p:nvPr/>
         </p:nvSpPr>
@@ -4284,41 +4214,6 @@
         </p:nvSpPr>
         <p:spPr>
           <a:xfrm>
-            <a:off x="2194560" y="6446520"/>
-            <a:ext cx="5943600" cy="274320"/>
-          </a:xfrm>
-          <a:prstGeom prst="rect">
-            <a:avLst/>
-          </a:prstGeom>
-          <a:noFill/>
-        </p:spPr>
-        <p:txBody>
-          <a:bodyPr wrap="square" anchor="t" lIns="0" rIns="0" tIns="0" bIns="0">
-            <a:spAutoFit/>
-          </a:bodyPr>
-          <a:lstStyle/>
-          <a:p>
-            <a:pPr algn="l"/>
-            <a:r>
-              <a:rPr sz="1000" b="1" i="0">
-                <a:solidFill>
-                  <a:srgbClr val="8F989D"/>
-                </a:solidFill>
-                <a:latin typeface="Calibri"/>
-              </a:rPr>
-              <a:t>Inicio 5:10 pm</a:t>
-            </a:r>
-          </a:p>
-        </p:txBody>
-      </p:sp>
-      <p:sp>
-        <p:nvSpPr>
-          <p:cNvPr id="11" name="TextBox 10"/>
-          <p:cNvSpPr txBox="1"/>
-          <p:nvPr/>
-        </p:nvSpPr>
-        <p:spPr>
-          <a:xfrm>
             <a:off x="11094415" y="6446520"/>
             <a:ext cx="548640" cy="274320"/>
           </a:xfrm>
@@ -4553,41 +4448,6 @@
         </p:nvSpPr>
         <p:spPr>
           <a:xfrm>
-            <a:off x="2194560" y="6446520"/>
-            <a:ext cx="5943600" cy="274320"/>
-          </a:xfrm>
-          <a:prstGeom prst="rect">
-            <a:avLst/>
-          </a:prstGeom>
-          <a:noFill/>
-        </p:spPr>
-        <p:txBody>
-          <a:bodyPr wrap="square" anchor="t" lIns="0" rIns="0" tIns="0" bIns="0">
-            <a:spAutoFit/>
-          </a:bodyPr>
-          <a:lstStyle/>
-          <a:p>
-            <a:pPr algn="l"/>
-            <a:r>
-              <a:rPr sz="1000" b="1" i="0">
-                <a:solidFill>
-                  <a:srgbClr val="8F989D"/>
-                </a:solidFill>
-                <a:latin typeface="Calibri"/>
-              </a:rPr>
-              <a:t>Inicio 5:10 pm</a:t>
-            </a:r>
-          </a:p>
-        </p:txBody>
-      </p:sp>
-      <p:sp>
-        <p:nvSpPr>
-          <p:cNvPr id="7" name="TextBox 6"/>
-          <p:cNvSpPr txBox="1"/>
-          <p:nvPr/>
-        </p:nvSpPr>
-        <p:spPr>
-          <a:xfrm>
             <a:off x="11094415" y="6446520"/>
             <a:ext cx="548640" cy="274320"/>
           </a:xfrm>
@@ -4754,7 +4614,7 @@
                 </a:solidFill>
                 <a:latin typeface="Calibri"/>
               </a:rPr>
-              <a:t>–   En TG3 el documento pasa por la </a:t>
+              <a:t>–   En TG3 la entrega pasa por la </a:t>
             </a:r>
             <a:r>
               <a:rPr sz="1600" b="1" i="0">
@@ -4763,16 +4623,16 @@
                 </a:solidFill>
                 <a:latin typeface="Calibri"/>
               </a:rPr>
-              <a:t>herramienta antiplagio institucional del campus (CDigital)</a:t>
-            </a:r>
-            <a:r>
-              <a:rPr sz="1600" b="0" i="0">
-                <a:solidFill>
-                  <a:srgbClr val="2B2B2B"/>
-                </a:solidFill>
-                <a:latin typeface="Calibri"/>
-              </a:rPr>
-              <a:t>. No hay que buscar servicios externos.</a:t>
+              <a:t>revisión de similitud institucional del aula (CDigital)</a:t>
+            </a:r>
+            <a:r>
+              <a:rPr sz="1600" b="0" i="0">
+                <a:solidFill>
+                  <a:srgbClr val="2B2B2B"/>
+                </a:solidFill>
+                <a:latin typeface="Calibri"/>
+              </a:rPr>
+              <a:t>; el Docente de TG3 confirma cómo opera. No hay que buscar servicios externos.</a:t>
             </a:r>
           </a:p>
           <a:p>
@@ -4964,41 +4824,6 @@
       <p:sp>
         <p:nvSpPr>
           <p:cNvPr id="5" name="TextBox 4"/>
-          <p:cNvSpPr txBox="1"/>
-          <p:nvPr/>
-        </p:nvSpPr>
-        <p:spPr>
-          <a:xfrm>
-            <a:off x="2194560" y="6446520"/>
-            <a:ext cx="5943600" cy="274320"/>
-          </a:xfrm>
-          <a:prstGeom prst="rect">
-            <a:avLst/>
-          </a:prstGeom>
-          <a:noFill/>
-        </p:spPr>
-        <p:txBody>
-          <a:bodyPr wrap="square" anchor="t" lIns="0" rIns="0" tIns="0" bIns="0">
-            <a:spAutoFit/>
-          </a:bodyPr>
-          <a:lstStyle/>
-          <a:p>
-            <a:pPr algn="l"/>
-            <a:r>
-              <a:rPr sz="1000" b="1" i="0">
-                <a:solidFill>
-                  <a:srgbClr val="8F989D"/>
-                </a:solidFill>
-                <a:latin typeface="Calibri"/>
-              </a:rPr>
-              <a:t>Inicio 5:10 pm</a:t>
-            </a:r>
-          </a:p>
-        </p:txBody>
-      </p:sp>
-      <p:sp>
-        <p:nvSpPr>
-          <p:cNvPr id="6" name="TextBox 5"/>
           <p:cNvSpPr txBox="1"/>
           <p:nvPr/>
         </p:nvSpPr>
@@ -5405,7 +5230,7 @@
                 </a:solidFill>
                 <a:latin typeface="Calibri"/>
               </a:rPr>
-              <a:t>El parafraseo perezoso cambia palabras y conserva la estructura: es lo que la herramienta detecta y lo que un lector experto reconoce de inmediato.</a:t>
+              <a:t>El parafraseo perezoso cambia palabras y conserva la estructura: es lo que la revisión de similitud marca y lo que un lector experto reconoce de inmediato.</a:t>
             </a:r>
           </a:p>
         </p:txBody>
@@ -5413,41 +5238,6 @@
       <p:sp>
         <p:nvSpPr>
           <p:cNvPr id="6" name="TextBox 5"/>
-          <p:cNvSpPr txBox="1"/>
-          <p:nvPr/>
-        </p:nvSpPr>
-        <p:spPr>
-          <a:xfrm>
-            <a:off x="2194560" y="6446520"/>
-            <a:ext cx="5943600" cy="274320"/>
-          </a:xfrm>
-          <a:prstGeom prst="rect">
-            <a:avLst/>
-          </a:prstGeom>
-          <a:noFill/>
-        </p:spPr>
-        <p:txBody>
-          <a:bodyPr wrap="square" anchor="t" lIns="0" rIns="0" tIns="0" bIns="0">
-            <a:spAutoFit/>
-          </a:bodyPr>
-          <a:lstStyle/>
-          <a:p>
-            <a:pPr algn="l"/>
-            <a:r>
-              <a:rPr sz="1000" b="1" i="0">
-                <a:solidFill>
-                  <a:srgbClr val="8F989D"/>
-                </a:solidFill>
-                <a:latin typeface="Calibri"/>
-              </a:rPr>
-              <a:t>Inicio 5:10 pm</a:t>
-            </a:r>
-          </a:p>
-        </p:txBody>
-      </p:sp>
-      <p:sp>
-        <p:nvSpPr>
-          <p:cNvPr id="7" name="TextBox 6"/>
           <p:cNvSpPr txBox="1"/>
           <p:nvPr/>
         </p:nvSpPr>
@@ -5978,41 +5768,6 @@
         </p:nvSpPr>
         <p:spPr>
           <a:xfrm>
-            <a:off x="2194560" y="6446520"/>
-            <a:ext cx="5943600" cy="274320"/>
-          </a:xfrm>
-          <a:prstGeom prst="rect">
-            <a:avLst/>
-          </a:prstGeom>
-          <a:noFill/>
-        </p:spPr>
-        <p:txBody>
-          <a:bodyPr wrap="square" anchor="t" lIns="0" rIns="0" tIns="0" bIns="0">
-            <a:spAutoFit/>
-          </a:bodyPr>
-          <a:lstStyle/>
-          <a:p>
-            <a:pPr algn="l"/>
-            <a:r>
-              <a:rPr sz="1000" b="1" i="0">
-                <a:solidFill>
-                  <a:srgbClr val="8F989D"/>
-                </a:solidFill>
-                <a:latin typeface="Calibri"/>
-              </a:rPr>
-              <a:t>Inicio 5:10 pm</a:t>
-            </a:r>
-          </a:p>
-        </p:txBody>
-      </p:sp>
-      <p:sp>
-        <p:nvSpPr>
-          <p:cNvPr id="6" name="TextBox 5"/>
-          <p:cNvSpPr txBox="1"/>
-          <p:nvPr/>
-        </p:nvSpPr>
-        <p:spPr>
-          <a:xfrm>
             <a:off x="11094415" y="6446520"/>
             <a:ext cx="548640" cy="274320"/>
           </a:xfrm>
@@ -6042,7 +5797,7 @@
       </p:sp>
       <p:sp>
         <p:nvSpPr>
-          <p:cNvPr id="7" name="TextBox 6"/>
+          <p:cNvPr id="6" name="TextBox 5"/>
           <p:cNvSpPr txBox="1"/>
           <p:nvPr/>
         </p:nvSpPr>
@@ -6520,41 +6275,6 @@
         </p:nvSpPr>
         <p:spPr>
           <a:xfrm>
-            <a:off x="2194560" y="6446520"/>
-            <a:ext cx="5943600" cy="274320"/>
-          </a:xfrm>
-          <a:prstGeom prst="rect">
-            <a:avLst/>
-          </a:prstGeom>
-          <a:noFill/>
-        </p:spPr>
-        <p:txBody>
-          <a:bodyPr wrap="square" anchor="t" lIns="0" rIns="0" tIns="0" bIns="0">
-            <a:spAutoFit/>
-          </a:bodyPr>
-          <a:lstStyle/>
-          <a:p>
-            <a:pPr algn="l"/>
-            <a:r>
-              <a:rPr sz="1000" b="1" i="0">
-                <a:solidFill>
-                  <a:srgbClr val="8F989D"/>
-                </a:solidFill>
-                <a:latin typeface="Calibri"/>
-              </a:rPr>
-              <a:t>Inicio 5:10 pm</a:t>
-            </a:r>
-          </a:p>
-        </p:txBody>
-      </p:sp>
-      <p:sp>
-        <p:nvSpPr>
-          <p:cNvPr id="6" name="TextBox 5"/>
-          <p:cNvSpPr txBox="1"/>
-          <p:nvPr/>
-        </p:nvSpPr>
-        <p:spPr>
-          <a:xfrm>
             <a:off x="11094415" y="6446520"/>
             <a:ext cx="548640" cy="274320"/>
           </a:xfrm>
@@ -6846,41 +6566,6 @@
         </p:nvSpPr>
         <p:spPr>
           <a:xfrm>
-            <a:off x="2194560" y="6446520"/>
-            <a:ext cx="5943600" cy="274320"/>
-          </a:xfrm>
-          <a:prstGeom prst="rect">
-            <a:avLst/>
-          </a:prstGeom>
-          <a:noFill/>
-        </p:spPr>
-        <p:txBody>
-          <a:bodyPr wrap="square" anchor="t" lIns="0" rIns="0" tIns="0" bIns="0">
-            <a:spAutoFit/>
-          </a:bodyPr>
-          <a:lstStyle/>
-          <a:p>
-            <a:pPr algn="l"/>
-            <a:r>
-              <a:rPr sz="1000" b="1" i="0">
-                <a:solidFill>
-                  <a:srgbClr val="8F989D"/>
-                </a:solidFill>
-                <a:latin typeface="Calibri"/>
-              </a:rPr>
-              <a:t>Inicio 5:10 pm</a:t>
-            </a:r>
-          </a:p>
-        </p:txBody>
-      </p:sp>
-      <p:sp>
-        <p:nvSpPr>
-          <p:cNvPr id="6" name="TextBox 5"/>
-          <p:cNvSpPr txBox="1"/>
-          <p:nvPr/>
-        </p:nvSpPr>
-        <p:spPr>
-          <a:xfrm>
             <a:off x="11094415" y="6446520"/>
             <a:ext cx="548640" cy="274320"/>
           </a:xfrm>
@@ -7244,41 +6929,6 @@
         </p:nvSpPr>
         <p:spPr>
           <a:xfrm>
-            <a:off x="2194560" y="6446520"/>
-            <a:ext cx="5943600" cy="274320"/>
-          </a:xfrm>
-          <a:prstGeom prst="rect">
-            <a:avLst/>
-          </a:prstGeom>
-          <a:noFill/>
-        </p:spPr>
-        <p:txBody>
-          <a:bodyPr wrap="square" anchor="t" lIns="0" rIns="0" tIns="0" bIns="0">
-            <a:spAutoFit/>
-          </a:bodyPr>
-          <a:lstStyle/>
-          <a:p>
-            <a:pPr algn="l"/>
-            <a:r>
-              <a:rPr sz="1000" b="1" i="0">
-                <a:solidFill>
-                  <a:srgbClr val="8F989D"/>
-                </a:solidFill>
-                <a:latin typeface="Calibri"/>
-              </a:rPr>
-              <a:t>Inicio 5:10 pm</a:t>
-            </a:r>
-          </a:p>
-        </p:txBody>
-      </p:sp>
-      <p:sp>
-        <p:nvSpPr>
-          <p:cNvPr id="6" name="TextBox 5"/>
-          <p:cNvSpPr txBox="1"/>
-          <p:nvPr/>
-        </p:nvSpPr>
-        <p:spPr>
-          <a:xfrm>
             <a:off x="11094415" y="6446520"/>
             <a:ext cx="548640" cy="274320"/>
           </a:xfrm>
@@ -7525,41 +7175,6 @@
           </a:p>
         </p:txBody>
       </p:sp>
-      <p:sp>
-        <p:nvSpPr>
-          <p:cNvPr id="7" name="TextBox 6"/>
-          <p:cNvSpPr txBox="1"/>
-          <p:nvPr/>
-        </p:nvSpPr>
-        <p:spPr>
-          <a:xfrm>
-            <a:off x="2194560" y="6446520"/>
-            <a:ext cx="5943600" cy="274320"/>
-          </a:xfrm>
-          <a:prstGeom prst="rect">
-            <a:avLst/>
-          </a:prstGeom>
-          <a:noFill/>
-        </p:spPr>
-        <p:txBody>
-          <a:bodyPr wrap="square" anchor="t" lIns="0" rIns="0" tIns="0" bIns="0">
-            <a:spAutoFit/>
-          </a:bodyPr>
-          <a:lstStyle/>
-          <a:p>
-            <a:pPr algn="l"/>
-            <a:r>
-              <a:rPr sz="1000" b="1" i="0">
-                <a:solidFill>
-                  <a:srgbClr val="8F989D"/>
-                </a:solidFill>
-                <a:latin typeface="Calibri"/>
-              </a:rPr>
-              <a:t>Inicio 5:10 pm</a:t>
-            </a:r>
-          </a:p>
-        </p:txBody>
-      </p:sp>
     </p:spTree>
   </p:cSld>
   <p:clrMapOvr>
@@ -7916,41 +7531,6 @@
         </p:nvSpPr>
         <p:spPr>
           <a:xfrm>
-            <a:off x="2194560" y="6446520"/>
-            <a:ext cx="5943600" cy="274320"/>
-          </a:xfrm>
-          <a:prstGeom prst="rect">
-            <a:avLst/>
-          </a:prstGeom>
-          <a:noFill/>
-        </p:spPr>
-        <p:txBody>
-          <a:bodyPr wrap="square" anchor="t" lIns="0" rIns="0" tIns="0" bIns="0">
-            <a:spAutoFit/>
-          </a:bodyPr>
-          <a:lstStyle/>
-          <a:p>
-            <a:pPr algn="l"/>
-            <a:r>
-              <a:rPr sz="1000" b="1" i="0">
-                <a:solidFill>
-                  <a:srgbClr val="8F989D"/>
-                </a:solidFill>
-                <a:latin typeface="Calibri"/>
-              </a:rPr>
-              <a:t>Inicio 5:10 pm</a:t>
-            </a:r>
-          </a:p>
-        </p:txBody>
-      </p:sp>
-      <p:sp>
-        <p:nvSpPr>
-          <p:cNvPr id="6" name="TextBox 5"/>
-          <p:cNvSpPr txBox="1"/>
-          <p:nvPr/>
-        </p:nvSpPr>
-        <p:spPr>
-          <a:xfrm>
             <a:off x="11094415" y="6446520"/>
             <a:ext cx="548640" cy="274320"/>
           </a:xfrm>
@@ -7980,7 +7560,7 @@
       </p:sp>
       <p:sp>
         <p:nvSpPr>
-          <p:cNvPr id="7" name="TextBox 6"/>
+          <p:cNvPr id="6" name="TextBox 5"/>
           <p:cNvSpPr txBox="1"/>
           <p:nvPr/>
         </p:nvSpPr>
@@ -8397,41 +7977,6 @@
       <p:sp>
         <p:nvSpPr>
           <p:cNvPr id="5" name="TextBox 4"/>
-          <p:cNvSpPr txBox="1"/>
-          <p:nvPr/>
-        </p:nvSpPr>
-        <p:spPr>
-          <a:xfrm>
-            <a:off x="2194560" y="6446520"/>
-            <a:ext cx="5943600" cy="274320"/>
-          </a:xfrm>
-          <a:prstGeom prst="rect">
-            <a:avLst/>
-          </a:prstGeom>
-          <a:noFill/>
-        </p:spPr>
-        <p:txBody>
-          <a:bodyPr wrap="square" anchor="t" lIns="0" rIns="0" tIns="0" bIns="0">
-            <a:spAutoFit/>
-          </a:bodyPr>
-          <a:lstStyle/>
-          <a:p>
-            <a:pPr algn="l"/>
-            <a:r>
-              <a:rPr sz="1000" b="1" i="0">
-                <a:solidFill>
-                  <a:srgbClr val="8F989D"/>
-                </a:solidFill>
-                <a:latin typeface="Calibri"/>
-              </a:rPr>
-              <a:t>Inicio 5:10 pm</a:t>
-            </a:r>
-          </a:p>
-        </p:txBody>
-      </p:sp>
-      <p:sp>
-        <p:nvSpPr>
-          <p:cNvPr id="6" name="TextBox 5"/>
           <p:cNvSpPr txBox="1"/>
           <p:nvPr/>
         </p:nvSpPr>
@@ -9277,41 +8822,6 @@
         </p:nvSpPr>
         <p:spPr>
           <a:xfrm>
-            <a:off x="2194560" y="6446520"/>
-            <a:ext cx="5943600" cy="274320"/>
-          </a:xfrm>
-          <a:prstGeom prst="rect">
-            <a:avLst/>
-          </a:prstGeom>
-          <a:noFill/>
-        </p:spPr>
-        <p:txBody>
-          <a:bodyPr wrap="square" anchor="t" lIns="0" rIns="0" tIns="0" bIns="0">
-            <a:spAutoFit/>
-          </a:bodyPr>
-          <a:lstStyle/>
-          <a:p>
-            <a:pPr algn="l"/>
-            <a:r>
-              <a:rPr sz="1000" b="1" i="0">
-                <a:solidFill>
-                  <a:srgbClr val="8F989D"/>
-                </a:solidFill>
-                <a:latin typeface="Calibri"/>
-              </a:rPr>
-              <a:t>Inicio 5:10 pm</a:t>
-            </a:r>
-          </a:p>
-        </p:txBody>
-      </p:sp>
-      <p:sp>
-        <p:nvSpPr>
-          <p:cNvPr id="7" name="TextBox 6"/>
-          <p:cNvSpPr txBox="1"/>
-          <p:nvPr/>
-        </p:nvSpPr>
-        <p:spPr>
-          <a:xfrm>
             <a:off x="11094415" y="6446520"/>
             <a:ext cx="548640" cy="274320"/>
           </a:xfrm>
@@ -9742,41 +9252,6 @@
       <p:sp>
         <p:nvSpPr>
           <p:cNvPr id="5" name="TextBox 4"/>
-          <p:cNvSpPr txBox="1"/>
-          <p:nvPr/>
-        </p:nvSpPr>
-        <p:spPr>
-          <a:xfrm>
-            <a:off x="2194560" y="6446520"/>
-            <a:ext cx="5943600" cy="274320"/>
-          </a:xfrm>
-          <a:prstGeom prst="rect">
-            <a:avLst/>
-          </a:prstGeom>
-          <a:noFill/>
-        </p:spPr>
-        <p:txBody>
-          <a:bodyPr wrap="square" anchor="t" lIns="0" rIns="0" tIns="0" bIns="0">
-            <a:spAutoFit/>
-          </a:bodyPr>
-          <a:lstStyle/>
-          <a:p>
-            <a:pPr algn="l"/>
-            <a:r>
-              <a:rPr sz="1000" b="1" i="0">
-                <a:solidFill>
-                  <a:srgbClr val="8F989D"/>
-                </a:solidFill>
-                <a:latin typeface="Calibri"/>
-              </a:rPr>
-              <a:t>Inicio 5:10 pm</a:t>
-            </a:r>
-          </a:p>
-        </p:txBody>
-      </p:sp>
-      <p:sp>
-        <p:nvSpPr>
-          <p:cNvPr id="6" name="TextBox 5"/>
           <p:cNvSpPr txBox="1"/>
           <p:nvPr/>
         </p:nvSpPr>
@@ -10498,41 +9973,6 @@
         </p:nvSpPr>
         <p:spPr>
           <a:xfrm>
-            <a:off x="2194560" y="6446520"/>
-            <a:ext cx="5943600" cy="274320"/>
-          </a:xfrm>
-          <a:prstGeom prst="rect">
-            <a:avLst/>
-          </a:prstGeom>
-          <a:noFill/>
-        </p:spPr>
-        <p:txBody>
-          <a:bodyPr wrap="square" anchor="t" lIns="0" rIns="0" tIns="0" bIns="0">
-            <a:spAutoFit/>
-          </a:bodyPr>
-          <a:lstStyle/>
-          <a:p>
-            <a:pPr algn="l"/>
-            <a:r>
-              <a:rPr sz="1000" b="1" i="0">
-                <a:solidFill>
-                  <a:srgbClr val="8F989D"/>
-                </a:solidFill>
-                <a:latin typeface="Calibri"/>
-              </a:rPr>
-              <a:t>Inicio 5:10 pm</a:t>
-            </a:r>
-          </a:p>
-        </p:txBody>
-      </p:sp>
-      <p:sp>
-        <p:nvSpPr>
-          <p:cNvPr id="7" name="TextBox 6"/>
-          <p:cNvSpPr txBox="1"/>
-          <p:nvPr/>
-        </p:nvSpPr>
-        <p:spPr>
-          <a:xfrm>
             <a:off x="11094415" y="6446520"/>
             <a:ext cx="548640" cy="274320"/>
           </a:xfrm>
@@ -11040,41 +10480,6 @@
         </p:nvSpPr>
         <p:spPr>
           <a:xfrm>
-            <a:off x="2194560" y="6446520"/>
-            <a:ext cx="5943600" cy="274320"/>
-          </a:xfrm>
-          <a:prstGeom prst="rect">
-            <a:avLst/>
-          </a:prstGeom>
-          <a:noFill/>
-        </p:spPr>
-        <p:txBody>
-          <a:bodyPr wrap="square" anchor="t" lIns="0" rIns="0" tIns="0" bIns="0">
-            <a:spAutoFit/>
-          </a:bodyPr>
-          <a:lstStyle/>
-          <a:p>
-            <a:pPr algn="l"/>
-            <a:r>
-              <a:rPr sz="1000" b="1" i="0">
-                <a:solidFill>
-                  <a:srgbClr val="8F989D"/>
-                </a:solidFill>
-                <a:latin typeface="Calibri"/>
-              </a:rPr>
-              <a:t>Inicio 5:10 pm</a:t>
-            </a:r>
-          </a:p>
-        </p:txBody>
-      </p:sp>
-      <p:sp>
-        <p:nvSpPr>
-          <p:cNvPr id="6" name="TextBox 5"/>
-          <p:cNvSpPr txBox="1"/>
-          <p:nvPr/>
-        </p:nvSpPr>
-        <p:spPr>
-          <a:xfrm>
             <a:off x="11094415" y="6446520"/>
             <a:ext cx="548640" cy="274320"/>
           </a:xfrm>
@@ -11451,41 +10856,6 @@
       <p:sp>
         <p:nvSpPr>
           <p:cNvPr id="5" name="TextBox 4"/>
-          <p:cNvSpPr txBox="1"/>
-          <p:nvPr/>
-        </p:nvSpPr>
-        <p:spPr>
-          <a:xfrm>
-            <a:off x="2194560" y="6446520"/>
-            <a:ext cx="5943600" cy="274320"/>
-          </a:xfrm>
-          <a:prstGeom prst="rect">
-            <a:avLst/>
-          </a:prstGeom>
-          <a:noFill/>
-        </p:spPr>
-        <p:txBody>
-          <a:bodyPr wrap="square" anchor="t" lIns="0" rIns="0" tIns="0" bIns="0">
-            <a:spAutoFit/>
-          </a:bodyPr>
-          <a:lstStyle/>
-          <a:p>
-            <a:pPr algn="l"/>
-            <a:r>
-              <a:rPr sz="1000" b="1" i="0">
-                <a:solidFill>
-                  <a:srgbClr val="8F989D"/>
-                </a:solidFill>
-                <a:latin typeface="Calibri"/>
-              </a:rPr>
-              <a:t>Inicio 5:10 pm</a:t>
-            </a:r>
-          </a:p>
-        </p:txBody>
-      </p:sp>
-      <p:sp>
-        <p:nvSpPr>
-          <p:cNvPr id="6" name="TextBox 5"/>
           <p:cNvSpPr txBox="1"/>
           <p:nvPr/>
         </p:nvSpPr>
@@ -12157,7 +11527,7 @@
                           </a:solidFill>
                           <a:latin typeface="Calibri"/>
                         </a:rPr>
-                        <a:t>Preparar sustentación y verificar antiplagio</a:t>
+                        <a:t>Preparar sustentación y alistar el documento para la revisión de similitud</a:t>
                       </a:r>
                     </a:p>
                   </a:txBody>
@@ -12203,7 +11573,7 @@
                           </a:solidFill>
                           <a:latin typeface="Calibri"/>
                         </a:rPr>
-                        <a:t>Documento final y herramienta institucional del campus</a:t>
+                        <a:t>Documento final e indicaciones del Docente de TG3</a:t>
                       </a:r>
                     </a:p>
                   </a:txBody>
@@ -12255,41 +11625,6 @@
       <p:sp>
         <p:nvSpPr>
           <p:cNvPr id="6" name="TextBox 5"/>
-          <p:cNvSpPr txBox="1"/>
-          <p:nvPr/>
-        </p:nvSpPr>
-        <p:spPr>
-          <a:xfrm>
-            <a:off x="2194560" y="6446520"/>
-            <a:ext cx="5943600" cy="274320"/>
-          </a:xfrm>
-          <a:prstGeom prst="rect">
-            <a:avLst/>
-          </a:prstGeom>
-          <a:noFill/>
-        </p:spPr>
-        <p:txBody>
-          <a:bodyPr wrap="square" anchor="t" lIns="0" rIns="0" tIns="0" bIns="0">
-            <a:spAutoFit/>
-          </a:bodyPr>
-          <a:lstStyle/>
-          <a:p>
-            <a:pPr algn="l"/>
-            <a:r>
-              <a:rPr sz="1000" b="1" i="0">
-                <a:solidFill>
-                  <a:srgbClr val="8F989D"/>
-                </a:solidFill>
-                <a:latin typeface="Calibri"/>
-              </a:rPr>
-              <a:t>Inicio 5:10 pm</a:t>
-            </a:r>
-          </a:p>
-        </p:txBody>
-      </p:sp>
-      <p:sp>
-        <p:nvSpPr>
-          <p:cNvPr id="7" name="TextBox 6"/>
           <p:cNvSpPr txBox="1"/>
           <p:nvPr/>
         </p:nvSpPr>

--- a/Pregrado/Trabajo de grado 2/Clases/Sesion 11 - Cierre del avance · preparación para TG3/Presentacion.pptx
+++ b/Pregrado/Trabajo de grado 2/Clases/Sesion 11 - Cierre del avance · preparación para TG3/Presentacion.pptx
@@ -24,6 +24,8 @@
     <p:sldId id="272" r:id="rId23"/>
     <p:sldId id="273" r:id="rId24"/>
     <p:sldId id="274" r:id="rId25"/>
+    <p:sldId id="275" r:id="rId26"/>
+    <p:sldId id="276" r:id="rId27"/>
   </p:sldIdLst>
   <p:sldSz cx="12191695" cy="6858000" type="screen4x3"/>
   <p:notesSz cx="6858000" cy="9144000"/>
@@ -5755,7 +5757,7 @@
                 </a:solidFill>
                 <a:latin typeface="Calibri"/>
               </a:rPr>
-              <a:t> — [URL CDigital — campus del curso pendiente].</a:t>
+              <a:t> — https://cdigital.cun.edu.co/course/view.php?id=129268.</a:t>
             </a:r>
           </a:p>
         </p:txBody>
@@ -5929,7 +5931,7 @@
                 </a:solidFill>
                 <a:latin typeface="Calibri"/>
               </a:rPr>
-              <a:t>TALLER — Versión limpia, checklist y pendientes para TG3</a:t>
+              <a:t>TALLER · Versión limpia, checklist y pendientes para TG3</a:t>
             </a:r>
           </a:p>
         </p:txBody>
@@ -5942,8 +5944,8 @@
         </p:nvSpPr>
         <p:spPr>
           <a:xfrm>
-            <a:off x="640080" y="1691639"/>
-            <a:ext cx="10911535" cy="4617720"/>
+            <a:off x="640080" y="1280160"/>
+            <a:ext cx="10911535" cy="411480"/>
           </a:xfrm>
           <a:prstGeom prst="rect">
             <a:avLst/>
@@ -5956,6 +5958,41 @@
           </a:bodyPr>
           <a:lstStyle/>
           <a:p>
+            <a:pPr algn="ctr"/>
+            <a:r>
+              <a:rPr sz="1500" b="0" i="0">
+                <a:solidFill>
+                  <a:srgbClr val="2B2B2B"/>
+                </a:solidFill>
+                <a:latin typeface="Calibri"/>
+              </a:rPr>
+              <a:t>Individual, con acompañamiento del Docente</a:t>
+            </a:r>
+          </a:p>
+        </p:txBody>
+      </p:sp>
+      <p:sp>
+        <p:nvSpPr>
+          <p:cNvPr id="5" name="TextBox 4"/>
+          <p:cNvSpPr txBox="1"/>
+          <p:nvPr/>
+        </p:nvSpPr>
+        <p:spPr>
+          <a:xfrm>
+            <a:off x="640080" y="2011679"/>
+            <a:ext cx="10911535" cy="4297680"/>
+          </a:xfrm>
+          <a:prstGeom prst="rect">
+            <a:avLst/>
+          </a:prstGeom>
+          <a:noFill/>
+        </p:spPr>
+        <p:txBody>
+          <a:bodyPr wrap="square" anchor="t" lIns="0" rIns="0" tIns="0" bIns="0">
+            <a:spAutoFit/>
+          </a:bodyPr>
+          <a:lstStyle/>
+          <a:p>
             <a:pPr>
               <a:spcAft>
                 <a:spcPts val="1000"/>
@@ -5977,16 +6014,16 @@
                 </a:solidFill>
                 <a:latin typeface="Calibri"/>
               </a:rPr>
-              <a:t>Tiempo:</a:t>
-            </a:r>
-            <a:r>
-              <a:rPr sz="1600" b="0" i="0">
-                <a:solidFill>
-                  <a:srgbClr val="2B2B2B"/>
-                </a:solidFill>
-                <a:latin typeface="Calibri"/>
-              </a:rPr>
-              <a:t> 20 minutos de trabajo individual, con acompañamiento del Docente.</a:t>
+              <a:t>Al final tiene:</a:t>
+            </a:r>
+            <a:r>
+              <a:rPr sz="1600" b="0" i="0">
+                <a:solidFill>
+                  <a:srgbClr val="2B2B2B"/>
+                </a:solidFill>
+                <a:latin typeface="Calibri"/>
+              </a:rPr>
+              <a:t> el checklist recorrido, una versión limpia del avance y la lista de pendientes para TG3.</a:t>
             </a:r>
           </a:p>
           <a:p>
@@ -6011,16 +6048,34 @@
                 </a:solidFill>
                 <a:latin typeface="Calibri"/>
               </a:rPr>
-              <a:t>Archivo:</a:t>
-            </a:r>
-            <a:r>
-              <a:rPr sz="1600" b="0" i="0">
-                <a:solidFill>
-                  <a:srgbClr val="2B2B2B"/>
-                </a:solidFill>
-                <a:latin typeface="Calibri"/>
-              </a:rPr>
-              <a:t> un documento en Google Docs llamado S11_CierreTG2_Apellido.</a:t>
+              <a:t>Paso 1</a:t>
+            </a:r>
+            <a:r>
+              <a:rPr sz="1600" b="0" i="0">
+                <a:solidFill>
+                  <a:srgbClr val="2B2B2B"/>
+                </a:solidFill>
+                <a:latin typeface="Calibri"/>
+              </a:rPr>
+              <a:t> · Recorra el </a:t>
+            </a:r>
+            <a:r>
+              <a:rPr sz="1600" b="1" i="0">
+                <a:solidFill>
+                  <a:srgbClr val="2B2B2B"/>
+                </a:solidFill>
+                <a:latin typeface="Calibri"/>
+              </a:rPr>
+              <a:t>checklist de cierre</a:t>
+            </a:r>
+            <a:r>
+              <a:rPr sz="1600" b="0" i="0">
+                <a:solidFill>
+                  <a:srgbClr val="2B2B2B"/>
+                </a:solidFill>
+                <a:latin typeface="Calibri"/>
+              </a:rPr>
+              <a:t> ítem por ítem y marque lo que está listo y lo que no.</a:t>
             </a:r>
           </a:p>
           <a:p>
@@ -6045,16 +6100,16 @@
                 </a:solidFill>
                 <a:latin typeface="Calibri"/>
               </a:rPr>
-              <a:t>Consigna 1.</a:t>
-            </a:r>
-            <a:r>
-              <a:rPr sz="1600" b="0" i="0">
-                <a:solidFill>
-                  <a:srgbClr val="2B2B2B"/>
-                </a:solidFill>
-                <a:latin typeface="Calibri"/>
-              </a:rPr>
-              <a:t> Recorra el </a:t>
+              <a:t>Paso 2</a:t>
+            </a:r>
+            <a:r>
+              <a:rPr sz="1600" b="0" i="0">
+                <a:solidFill>
+                  <a:srgbClr val="2B2B2B"/>
+                </a:solidFill>
+                <a:latin typeface="Calibri"/>
+              </a:rPr>
+              <a:t> · Deje una </a:t>
             </a:r>
             <a:r>
               <a:rPr sz="1600" b="1" i="0">
@@ -6063,16 +6118,16 @@
                 </a:solidFill>
                 <a:latin typeface="Calibri"/>
               </a:rPr>
-              <a:t>checklist de cierre</a:t>
-            </a:r>
-            <a:r>
-              <a:rPr sz="1600" b="0" i="0">
-                <a:solidFill>
-                  <a:srgbClr val="2B2B2B"/>
-                </a:solidFill>
-                <a:latin typeface="Calibri"/>
-              </a:rPr>
-              <a:t> ítem por ítem y marque lo que está listo y lo que no.</a:t>
+              <a:t>versión limpia</a:t>
+            </a:r>
+            <a:r>
+              <a:rPr sz="1600" b="0" i="0">
+                <a:solidFill>
+                  <a:srgbClr val="2B2B2B"/>
+                </a:solidFill>
+                <a:latin typeface="Calibri"/>
+              </a:rPr>
+              <a:t> del avance: formato de la Plantilla APA CUN aplicado y referencias completas en APA 7.</a:t>
             </a:r>
           </a:p>
           <a:p>
@@ -6097,16 +6152,16 @@
                 </a:solidFill>
                 <a:latin typeface="Calibri"/>
               </a:rPr>
-              <a:t>Consigna 2.</a:t>
-            </a:r>
-            <a:r>
-              <a:rPr sz="1600" b="0" i="0">
-                <a:solidFill>
-                  <a:srgbClr val="2B2B2B"/>
-                </a:solidFill>
-                <a:latin typeface="Calibri"/>
-              </a:rPr>
-              <a:t> Deje una </a:t>
+              <a:t>Paso 3</a:t>
+            </a:r>
+            <a:r>
+              <a:rPr sz="1600" b="0" i="0">
+                <a:solidFill>
+                  <a:srgbClr val="2B2B2B"/>
+                </a:solidFill>
+                <a:latin typeface="Calibri"/>
+              </a:rPr>
+              <a:t> · Escriba la </a:t>
             </a:r>
             <a:r>
               <a:rPr sz="1600" b="1" i="0">
@@ -6115,16 +6170,16 @@
                 </a:solidFill>
                 <a:latin typeface="Calibri"/>
               </a:rPr>
-              <a:t>versión limpia</a:t>
-            </a:r>
-            <a:r>
-              <a:rPr sz="1600" b="0" i="0">
-                <a:solidFill>
-                  <a:srgbClr val="2B2B2B"/>
-                </a:solidFill>
-                <a:latin typeface="Calibri"/>
-              </a:rPr>
-              <a:t> del avance: formato de la Plantilla APA CUN aplicado y referencias completas en APA 7.</a:t>
+              <a:t>lista de pendientes para TG3</a:t>
+            </a:r>
+            <a:r>
+              <a:rPr sz="1600" b="0" i="0">
+                <a:solidFill>
+                  <a:srgbClr val="2B2B2B"/>
+                </a:solidFill>
+                <a:latin typeface="Calibri"/>
+              </a:rPr>
+              <a:t> en imperativo, con por qué quedó pendiente y qué necesita para ejecutarlo.</a:t>
             </a:r>
           </a:p>
           <a:p>
@@ -6149,16 +6204,16 @@
                 </a:solidFill>
                 <a:latin typeface="Calibri"/>
               </a:rPr>
-              <a:t>Consigna 3.</a:t>
-            </a:r>
-            <a:r>
-              <a:rPr sz="1600" b="0" i="0">
-                <a:solidFill>
-                  <a:srgbClr val="2B2B2B"/>
-                </a:solidFill>
-                <a:latin typeface="Calibri"/>
-              </a:rPr>
-              <a:t> Escriba la </a:t>
+              <a:t>En clase, sin falta:</a:t>
+            </a:r>
+            <a:r>
+              <a:rPr sz="1600" b="0" i="0">
+                <a:solidFill>
+                  <a:srgbClr val="2B2B2B"/>
+                </a:solidFill>
+                <a:latin typeface="Calibri"/>
+              </a:rPr>
+              <a:t> los </a:t>
             </a:r>
             <a:r>
               <a:rPr sz="1600" b="1" i="0">
@@ -6167,109 +6222,23 @@
                 </a:solidFill>
                 <a:latin typeface="Calibri"/>
               </a:rPr>
-              <a:t>lista de pendientes para TG3</a:t>
-            </a:r>
-            <a:r>
-              <a:rPr sz="1600" b="0" i="0">
-                <a:solidFill>
-                  <a:srgbClr val="2B2B2B"/>
-                </a:solidFill>
-                <a:latin typeface="Calibri"/>
-              </a:rPr>
-              <a:t> en imperativo, con por qué quedó pendiente y qué necesita para ejecutarlo.</a:t>
-            </a:r>
-          </a:p>
-          <a:p>
-            <a:pPr>
-              <a:spcAft>
-                <a:spcPts val="1000"/>
-              </a:spcAft>
-            </a:pPr>
-            <a:r>
-              <a:rPr sz="1600" b="0" i="0">
-                <a:solidFill>
-                  <a:srgbClr val="2B2B2B"/>
-                </a:solidFill>
-                <a:latin typeface="Calibri"/>
-              </a:rPr>
-              <a:t>–   </a:t>
-            </a:r>
-            <a:r>
-              <a:rPr sz="1600" b="1" i="0">
-                <a:solidFill>
-                  <a:srgbClr val="2B2B2B"/>
-                </a:solidFill>
-                <a:latin typeface="Calibri"/>
-              </a:rPr>
-              <a:t>Criterio de éxito (verificable):</a:t>
-            </a:r>
-            <a:r>
-              <a:rPr sz="1600" b="0" i="0">
-                <a:solidFill>
-                  <a:srgbClr val="2B2B2B"/>
-                </a:solidFill>
-                <a:latin typeface="Calibri"/>
-              </a:rPr>
-              <a:t> el documento se lee coherente de punta a punta; ningún ítem del checklist quedó sin marcar ni sin pasar a pendientes; cualquier persona que abra su lista sabe qué falta para TG3.</a:t>
-            </a:r>
-          </a:p>
-          <a:p>
-            <a:pPr>
-              <a:spcAft>
-                <a:spcPts val="1000"/>
-              </a:spcAft>
-            </a:pPr>
-            <a:r>
-              <a:rPr sz="1600" b="0" i="0">
-                <a:solidFill>
-                  <a:srgbClr val="2B2B2B"/>
-                </a:solidFill>
-                <a:latin typeface="Calibri"/>
-              </a:rPr>
-              <a:t>–   </a:t>
-            </a:r>
-            <a:r>
-              <a:rPr sz="1600" b="1" i="0">
-                <a:solidFill>
-                  <a:srgbClr val="2B2B2B"/>
-                </a:solidFill>
-                <a:latin typeface="Calibri"/>
-              </a:rPr>
-              <a:t>Entrega:</a:t>
-            </a:r>
-            <a:r>
-              <a:rPr sz="1600" b="0" i="0">
-                <a:solidFill>
-                  <a:srgbClr val="2B2B2B"/>
-                </a:solidFill>
-                <a:latin typeface="Calibri"/>
-              </a:rPr>
-              <a:t> suba S11_CierreTG2_Apellido a </a:t>
-            </a:r>
-            <a:r>
-              <a:rPr sz="1600" b="1" i="0">
-                <a:solidFill>
-                  <a:srgbClr val="2B2B2B"/>
-                </a:solidFill>
-                <a:latin typeface="Calibri"/>
-              </a:rPr>
-              <a:t>CDigital</a:t>
-            </a:r>
-            <a:r>
-              <a:rPr sz="1600" b="0" i="0">
-                <a:solidFill>
-                  <a:srgbClr val="2B2B2B"/>
-                </a:solidFill>
-                <a:latin typeface="Calibri"/>
-              </a:rPr>
-              <a:t> — [URL CDigital — campus del curso pendiente].</a:t>
-            </a:r>
-          </a:p>
-        </p:txBody>
-      </p:sp>
-      <p:sp>
-        <p:nvSpPr>
-          <p:cNvPr id="5" name="TextBox 4"/>
+              <a:t>3 pasos</a:t>
+            </a:r>
+            <a:r>
+              <a:rPr sz="1600" b="0" i="0">
+                <a:solidFill>
+                  <a:srgbClr val="2B2B2B"/>
+                </a:solidFill>
+                <a:latin typeface="Calibri"/>
+              </a:rPr>
+              <a:t>. Lo que no alcance, ciérrelo hoy mismo en autónomo.</a:t>
+            </a:r>
+          </a:p>
+        </p:txBody>
+      </p:sp>
+      <p:sp>
+        <p:nvSpPr>
+          <p:cNvPr id="6" name="TextBox 5"/>
           <p:cNvSpPr txBox="1"/>
           <p:nvPr/>
         </p:nvSpPr>
@@ -6402,7 +6371,7 @@
                 </a:solidFill>
                 <a:latin typeface="Calibri"/>
               </a:rPr>
-              <a:t>Checklist de autoevaluación antes de entregar</a:t>
+              <a:t>TALLER · cómo se revisa y dónde se entrega</a:t>
             </a:r>
           </a:p>
         </p:txBody>
@@ -6415,8 +6384,8 @@
         </p:nvSpPr>
         <p:spPr>
           <a:xfrm>
-            <a:off x="640080" y="1691639"/>
-            <a:ext cx="10911535" cy="4617720"/>
+            <a:off x="640080" y="1280160"/>
+            <a:ext cx="10911535" cy="411480"/>
           </a:xfrm>
           <a:prstGeom prst="rect">
             <a:avLst/>
@@ -6429,6 +6398,41 @@
           </a:bodyPr>
           <a:lstStyle/>
           <a:p>
+            <a:pPr algn="ctr"/>
+            <a:r>
+              <a:rPr sz="1500" b="0" i="0">
+                <a:solidFill>
+                  <a:srgbClr val="2B2B2B"/>
+                </a:solidFill>
+                <a:latin typeface="Calibri"/>
+              </a:rPr>
+              <a:t>Versión limpia, checklist y pendientes para TG3</a:t>
+            </a:r>
+          </a:p>
+        </p:txBody>
+      </p:sp>
+      <p:sp>
+        <p:nvSpPr>
+          <p:cNvPr id="5" name="TextBox 4"/>
+          <p:cNvSpPr txBox="1"/>
+          <p:nvPr/>
+        </p:nvSpPr>
+        <p:spPr>
+          <a:xfrm>
+            <a:off x="640080" y="2011679"/>
+            <a:ext cx="10911535" cy="4297680"/>
+          </a:xfrm>
+          <a:prstGeom prst="rect">
+            <a:avLst/>
+          </a:prstGeom>
+          <a:noFill/>
+        </p:spPr>
+        <p:txBody>
+          <a:bodyPr wrap="square" anchor="t" lIns="0" rIns="0" tIns="0" bIns="0">
+            <a:spAutoFit/>
+          </a:bodyPr>
+          <a:lstStyle/>
+          <a:p>
             <a:pPr>
               <a:spcAft>
                 <a:spcPts val="1000"/>
@@ -6441,7 +6445,127 @@
                 </a:solidFill>
                 <a:latin typeface="Calibri"/>
               </a:rPr>
-              <a:t>–   ¿Mi documento está escrito sobre la Plantilla APA CUN y no sobre un archivo en blanco?</a:t>
+              <a:t>–   </a:t>
+            </a:r>
+            <a:r>
+              <a:rPr sz="1600" b="1" i="0">
+                <a:solidFill>
+                  <a:srgbClr val="2B2B2B"/>
+                </a:solidFill>
+                <a:latin typeface="Calibri"/>
+              </a:rPr>
+              <a:t>Quedó bien si</a:t>
+            </a:r>
+            <a:r>
+              <a:rPr sz="1600" b="0" i="0">
+                <a:solidFill>
+                  <a:srgbClr val="2B2B2B"/>
+                </a:solidFill>
+                <a:latin typeface="Calibri"/>
+              </a:rPr>
+              <a:t> —compruébelo usted antes de cerrar el documento—:</a:t>
+            </a:r>
+          </a:p>
+          <a:p>
+            <a:pPr lvl="1">
+              <a:spcAft>
+                <a:spcPts val="600"/>
+              </a:spcAft>
+            </a:pPr>
+            <a:r>
+              <a:rPr sz="1500" b="0" i="0">
+                <a:solidFill>
+                  <a:srgbClr val="2B2B2B"/>
+                </a:solidFill>
+                <a:latin typeface="Calibri"/>
+              </a:rPr>
+              <a:t>●   El documento </a:t>
+            </a:r>
+            <a:r>
+              <a:rPr sz="1500" b="1" i="0">
+                <a:solidFill>
+                  <a:srgbClr val="2B2B2B"/>
+                </a:solidFill>
+                <a:latin typeface="Calibri"/>
+              </a:rPr>
+              <a:t>se lee coherente de punta a punta</a:t>
+            </a:r>
+            <a:r>
+              <a:rPr sz="1500" b="0" i="0">
+                <a:solidFill>
+                  <a:srgbClr val="2B2B2B"/>
+                </a:solidFill>
+                <a:latin typeface="Calibri"/>
+              </a:rPr>
+              <a:t>.</a:t>
+            </a:r>
+          </a:p>
+          <a:p>
+            <a:pPr lvl="1">
+              <a:spcAft>
+                <a:spcPts val="600"/>
+              </a:spcAft>
+            </a:pPr>
+            <a:r>
+              <a:rPr sz="1500" b="0" i="0">
+                <a:solidFill>
+                  <a:srgbClr val="2B2B2B"/>
+                </a:solidFill>
+                <a:latin typeface="Calibri"/>
+              </a:rPr>
+              <a:t>●   </a:t>
+            </a:r>
+            <a:r>
+              <a:rPr sz="1500" b="1" i="0">
+                <a:solidFill>
+                  <a:srgbClr val="2B2B2B"/>
+                </a:solidFill>
+                <a:latin typeface="Calibri"/>
+              </a:rPr>
+              <a:t>Ningún ítem del checklist quedó sin marcar</a:t>
+            </a:r>
+            <a:r>
+              <a:rPr sz="1500" b="0" i="0">
+                <a:solidFill>
+                  <a:srgbClr val="2B2B2B"/>
+                </a:solidFill>
+                <a:latin typeface="Calibri"/>
+              </a:rPr>
+              <a:t> ni sin pasar a pendientes.</a:t>
+            </a:r>
+          </a:p>
+          <a:p>
+            <a:pPr lvl="1">
+              <a:spcAft>
+                <a:spcPts val="600"/>
+              </a:spcAft>
+            </a:pPr>
+            <a:r>
+              <a:rPr sz="1500" b="0" i="0">
+                <a:solidFill>
+                  <a:srgbClr val="2B2B2B"/>
+                </a:solidFill>
+                <a:latin typeface="Calibri"/>
+              </a:rPr>
+              <a:t>●   Cualquier persona que abra su lista </a:t>
+            </a:r>
+            <a:r>
+              <a:rPr sz="1500" b="1" i="0">
+                <a:solidFill>
+                  <a:srgbClr val="2B2B2B"/>
+                </a:solidFill>
+                <a:latin typeface="Calibri"/>
+              </a:rPr>
+              <a:t>sabe qué falta</a:t>
+            </a:r>
+            <a:r>
+              <a:rPr sz="1500" b="0" i="0">
+                <a:solidFill>
+                  <a:srgbClr val="2B2B2B"/>
+                </a:solidFill>
+                <a:latin typeface="Calibri"/>
+              </a:rPr>
+              <a:t> para TG3.</a:t>
             </a:r>
           </a:p>
           <a:p>
@@ -6457,7 +6581,25 @@
                 </a:solidFill>
                 <a:latin typeface="Calibri"/>
               </a:rPr>
-              <a:t>–   ¿El título describe lo que el documento realmente hace?</a:t>
+              <a:t>–   </a:t>
+            </a:r>
+            <a:r>
+              <a:rPr sz="1600" b="1" i="0">
+                <a:solidFill>
+                  <a:srgbClr val="2B2B2B"/>
+                </a:solidFill>
+                <a:latin typeface="Calibri"/>
+              </a:rPr>
+              <a:t>Plan B:</a:t>
+            </a:r>
+            <a:r>
+              <a:rPr sz="1600" b="0" i="0">
+                <a:solidFill>
+                  <a:srgbClr val="2B2B2B"/>
+                </a:solidFill>
+                <a:latin typeface="Calibri"/>
+              </a:rPr>
+              <a:t> Si un ítem del checklist no está listo y hoy no se puede resolver, no lo deje en blanco: páselo a la lista de pendientes con lo que necesita para cerrarlo.</a:t>
             </a:r>
           </a:p>
           <a:p>
@@ -6473,7 +6615,61 @@
                 </a:solidFill>
                 <a:latin typeface="Calibri"/>
               </a:rPr>
-              <a:t>–   ¿Los objetivos específicos siguen alineados con la pregunta y con la matriz metodológica?</a:t>
+              <a:t>–   </a:t>
+            </a:r>
+            <a:r>
+              <a:rPr sz="1600" b="1" i="0">
+                <a:solidFill>
+                  <a:srgbClr val="2B2B2B"/>
+                </a:solidFill>
+                <a:latin typeface="Calibri"/>
+              </a:rPr>
+              <a:t>Entrega:</a:t>
+            </a:r>
+            <a:r>
+              <a:rPr sz="1600" b="0" i="0">
+                <a:solidFill>
+                  <a:srgbClr val="2B2B2B"/>
+                </a:solidFill>
+                <a:latin typeface="Calibri"/>
+              </a:rPr>
+              <a:t> suba `S11_CierreTG2_Apellido` (Google Doc o PDF) como </a:t>
+            </a:r>
+            <a:r>
+              <a:rPr sz="1600" b="1" i="0">
+                <a:solidFill>
+                  <a:srgbClr val="2B2B2B"/>
+                </a:solidFill>
+                <a:latin typeface="Calibri"/>
+              </a:rPr>
+              <a:t>ACA Final</a:t>
+            </a:r>
+            <a:r>
+              <a:rPr sz="1600" b="0" i="0">
+                <a:solidFill>
+                  <a:srgbClr val="2B2B2B"/>
+                </a:solidFill>
+                <a:latin typeface="Calibri"/>
+              </a:rPr>
+              <a:t> —tarea, 32,8%— en </a:t>
+            </a:r>
+            <a:r>
+              <a:rPr sz="1600" b="1" i="0">
+                <a:solidFill>
+                  <a:srgbClr val="2B2B2B"/>
+                </a:solidFill>
+                <a:latin typeface="Calibri"/>
+              </a:rPr>
+              <a:t>CDigital</a:t>
+            </a:r>
+            <a:r>
+              <a:rPr sz="1600" b="0" i="0">
+                <a:solidFill>
+                  <a:srgbClr val="2B2B2B"/>
+                </a:solidFill>
+                <a:latin typeface="Calibri"/>
+              </a:rPr>
+              <a:t>.</a:t>
             </a:r>
           </a:p>
           <a:p>
@@ -6489,78 +6685,32 @@
                 </a:solidFill>
                 <a:latin typeface="Calibri"/>
               </a:rPr>
-              <a:t>–   ¿Toda cita tiene referencia y toda referencia fue citada en el cuerpo?</a:t>
-            </a:r>
-          </a:p>
-          <a:p>
-            <a:pPr>
-              <a:spcAft>
-                <a:spcPts val="1000"/>
-              </a:spcAft>
-            </a:pPr>
-            <a:r>
-              <a:rPr sz="1600" b="0" i="0">
-                <a:solidFill>
-                  <a:srgbClr val="2B2B2B"/>
-                </a:solidFill>
-                <a:latin typeface="Calibri"/>
-              </a:rPr>
-              <a:t>–   ¿Eliminé resaltados, corchetes y comentarios de trabajo del documento final?</a:t>
-            </a:r>
-          </a:p>
-          <a:p>
-            <a:pPr>
-              <a:spcAft>
-                <a:spcPts val="1000"/>
-              </a:spcAft>
-            </a:pPr>
-            <a:r>
-              <a:rPr sz="1600" b="0" i="0">
-                <a:solidFill>
-                  <a:srgbClr val="2B2B2B"/>
-                </a:solidFill>
-                <a:latin typeface="Calibri"/>
-              </a:rPr>
-              <a:t>–   ¿La metodología está redactada en propuesto, sin verbos en pasado sobre datos?</a:t>
-            </a:r>
-          </a:p>
-          <a:p>
-            <a:pPr>
-              <a:spcAft>
-                <a:spcPts val="1000"/>
-              </a:spcAft>
-            </a:pPr>
-            <a:r>
-              <a:rPr sz="1600" b="0" i="0">
-                <a:solidFill>
-                  <a:srgbClr val="2B2B2B"/>
-                </a:solidFill>
-                <a:latin typeface="Calibri"/>
-              </a:rPr>
-              <a:t>–   ¿Mi lista de pendientes está en imperativo e incluye lo que necesito gestionar (permisos, accesos)?</a:t>
-            </a:r>
-          </a:p>
-          <a:p>
-            <a:pPr>
-              <a:spcAft>
-                <a:spcPts val="1000"/>
-              </a:spcAft>
-            </a:pPr>
-            <a:r>
-              <a:rPr sz="1600" b="0" i="0">
-                <a:solidFill>
-                  <a:srgbClr val="2B2B2B"/>
-                </a:solidFill>
-                <a:latin typeface="Calibri"/>
-              </a:rPr>
-              <a:t>–   ¿Descargué el PDF, lo nombré S11_CierreTG2_Apellido y lo subí a CDigital?</a:t>
-            </a:r>
-          </a:p>
-        </p:txBody>
-      </p:sp>
-      <p:sp>
-        <p:nvSpPr>
-          <p:cNvPr id="5" name="TextBox 4"/>
+              <a:t>–   </a:t>
+            </a:r>
+            <a:r>
+              <a:rPr sz="1600" b="1" i="0">
+                <a:solidFill>
+                  <a:srgbClr val="2B2B2B"/>
+                </a:solidFill>
+                <a:latin typeface="Calibri"/>
+              </a:rPr>
+              <a:t>Verifique el estado:</a:t>
+            </a:r>
+            <a:r>
+              <a:rPr sz="1600" b="0" i="0">
+                <a:solidFill>
+                  <a:srgbClr val="2B2B2B"/>
+                </a:solidFill>
+                <a:latin typeface="Calibri"/>
+              </a:rPr>
+              <a:t> *subido* no es lo mismo que *entregado*. Lo que no esté en el aula, no está entregado.</a:t>
+            </a:r>
+          </a:p>
+        </p:txBody>
+      </p:sp>
+      <p:sp>
+        <p:nvSpPr>
+          <p:cNvPr id="6" name="TextBox 5"/>
           <p:cNvSpPr txBox="1"/>
           <p:nvPr/>
         </p:nvSpPr>
@@ -6693,7 +6843,7 @@
                 </a:solidFill>
                 <a:latin typeface="Calibri"/>
               </a:rPr>
-              <a:t>Cierre del curso y puente a TG3</a:t>
+              <a:t>Checklist de autoevaluación antes de entregar</a:t>
             </a:r>
           </a:p>
         </p:txBody>
@@ -6732,93 +6882,7 @@
                 </a:solidFill>
                 <a:latin typeface="Calibri"/>
               </a:rPr>
-              <a:t>–   Tres ideas para llevarse: cerrar TG2 es dejar un avance </a:t>
-            </a:r>
-            <a:r>
-              <a:rPr sz="1600" b="1" i="0">
-                <a:solidFill>
-                  <a:srgbClr val="2B2B2B"/>
-                </a:solidFill>
-                <a:latin typeface="Calibri"/>
-              </a:rPr>
-              <a:t>limpio</a:t>
-            </a:r>
-            <a:r>
-              <a:rPr sz="1600" b="0" i="0">
-                <a:solidFill>
-                  <a:srgbClr val="2B2B2B"/>
-                </a:solidFill>
-                <a:latin typeface="Calibri"/>
-              </a:rPr>
-              <a:t>, no terminar el grado.</a:t>
-            </a:r>
-          </a:p>
-          <a:p>
-            <a:pPr lvl="1">
-              <a:spcAft>
-                <a:spcPts val="600"/>
-              </a:spcAft>
-            </a:pPr>
-            <a:r>
-              <a:rPr sz="1500" b="0" i="0">
-                <a:solidFill>
-                  <a:srgbClr val="2B2B2B"/>
-                </a:solidFill>
-                <a:latin typeface="Calibri"/>
-              </a:rPr>
-              <a:t>●   El </a:t>
-            </a:r>
-            <a:r>
-              <a:rPr sz="1500" b="1" i="0">
-                <a:solidFill>
-                  <a:srgbClr val="2B2B2B"/>
-                </a:solidFill>
-                <a:latin typeface="Calibri"/>
-              </a:rPr>
-              <a:t>checklist</a:t>
-            </a:r>
-            <a:r>
-              <a:rPr sz="1500" b="0" i="0">
-                <a:solidFill>
-                  <a:srgbClr val="2B2B2B"/>
-                </a:solidFill>
-                <a:latin typeface="Calibri"/>
-              </a:rPr>
-              <a:t> garantiza que nada quede a medias sin quedar marcado.</a:t>
-            </a:r>
-          </a:p>
-          <a:p>
-            <a:pPr lvl="1">
-              <a:spcAft>
-                <a:spcPts val="600"/>
-              </a:spcAft>
-            </a:pPr>
-            <a:r>
-              <a:rPr sz="1500" b="0" i="0">
-                <a:solidFill>
-                  <a:srgbClr val="2B2B2B"/>
-                </a:solidFill>
-                <a:latin typeface="Calibri"/>
-              </a:rPr>
-              <a:t>●   La </a:t>
-            </a:r>
-            <a:r>
-              <a:rPr sz="1500" b="1" i="0">
-                <a:solidFill>
-                  <a:srgbClr val="2B2B2B"/>
-                </a:solidFill>
-                <a:latin typeface="Calibri"/>
-              </a:rPr>
-              <a:t>lista de pendientes</a:t>
-            </a:r>
-            <a:r>
-              <a:rPr sz="1500" b="0" i="0">
-                <a:solidFill>
-                  <a:srgbClr val="2B2B2B"/>
-                </a:solidFill>
-                <a:latin typeface="Calibri"/>
-              </a:rPr>
-              <a:t> es el puente: en TG3 usted retoma exactamente desde ahí.</a:t>
+              <a:t>–   ¿Mi documento está escrito sobre la Plantilla APA CUN y no sobre un archivo en blanco?</a:t>
             </a:r>
           </a:p>
           <a:p>
@@ -6834,7 +6898,7 @@
                 </a:solidFill>
                 <a:latin typeface="Calibri"/>
               </a:rPr>
-              <a:t>–   Suba a CDigital la versión limpia, el checklist recorrido y la lista de pendientes.</a:t>
+              <a:t>–   ¿El título describe lo que el documento realmente hace?</a:t>
             </a:r>
           </a:p>
           <a:p>
@@ -6850,25 +6914,7 @@
                 </a:solidFill>
                 <a:latin typeface="Calibri"/>
               </a:rPr>
-              <a:t>–   Revise en </a:t>
-            </a:r>
-            <a:r>
-              <a:rPr sz="1600" b="1" i="0">
-                <a:solidFill>
-                  <a:srgbClr val="2B2B2B"/>
-                </a:solidFill>
-                <a:latin typeface="Calibri"/>
-              </a:rPr>
-              <a:t>CDigital</a:t>
-            </a:r>
-            <a:r>
-              <a:rPr sz="1600" b="0" i="0">
-                <a:solidFill>
-                  <a:srgbClr val="2B2B2B"/>
-                </a:solidFill>
-                <a:latin typeface="Calibri"/>
-              </a:rPr>
-              <a:t> las indicaciones de las sesiones de trabajo autónomo y de la entrega final del avance.</a:t>
+              <a:t>–   ¿Los objetivos específicos siguen alineados con la pregunta y con la matriz metodológica?</a:t>
             </a:r>
           </a:p>
           <a:p>
@@ -6884,7 +6930,7 @@
                 </a:solidFill>
                 <a:latin typeface="Calibri"/>
               </a:rPr>
-              <a:t>–   Guarde el documento en su unidad personal y descargue una copia en PDF: no dependa de un solo lugar.</a:t>
+              <a:t>–   ¿Toda cita tiene referencia y toda referencia fue citada en el cuerpo?</a:t>
             </a:r>
           </a:p>
           <a:p>
@@ -6900,23 +6946,55 @@
                 </a:solidFill>
                 <a:latin typeface="Calibri"/>
               </a:rPr>
-              <a:t>–   Llegaron al curso con un proyecto disperso y se van con un avance ordenado y con una ruta escrita. Eso era exactamente lo que TG2 debía lograr.</a:t>
-            </a:r>
-          </a:p>
-          <a:p>
-            <a:pPr lvl="1">
+              <a:t>–   ¿Eliminé resaltados, corchetes y comentarios de trabajo del documento final?</a:t>
+            </a:r>
+          </a:p>
+          <a:p>
+            <a:pPr>
               <a:spcAft>
-                <a:spcPts val="600"/>
+                <a:spcPts val="1000"/>
               </a:spcAft>
             </a:pPr>
             <a:r>
-              <a:rPr sz="1500" b="0" i="0">
-                <a:solidFill>
-                  <a:srgbClr val="2B2B2B"/>
-                </a:solidFill>
-                <a:latin typeface="Calibri"/>
-              </a:rPr>
-              <a:t>●   Nos vemos en Trabajo de Grado 3, retomando desde su propia lista de pendientes.</a:t>
+              <a:rPr sz="1600" b="0" i="0">
+                <a:solidFill>
+                  <a:srgbClr val="2B2B2B"/>
+                </a:solidFill>
+                <a:latin typeface="Calibri"/>
+              </a:rPr>
+              <a:t>–   ¿La metodología está redactada en propuesto, sin verbos en pasado sobre datos?</a:t>
+            </a:r>
+          </a:p>
+          <a:p>
+            <a:pPr>
+              <a:spcAft>
+                <a:spcPts val="1000"/>
+              </a:spcAft>
+            </a:pPr>
+            <a:r>
+              <a:rPr sz="1600" b="0" i="0">
+                <a:solidFill>
+                  <a:srgbClr val="2B2B2B"/>
+                </a:solidFill>
+                <a:latin typeface="Calibri"/>
+              </a:rPr>
+              <a:t>–   ¿Mi lista de pendientes está en imperativo e incluye lo que necesito gestionar (permisos, accesos)?</a:t>
+            </a:r>
+          </a:p>
+          <a:p>
+            <a:pPr>
+              <a:spcAft>
+                <a:spcPts val="1000"/>
+              </a:spcAft>
+            </a:pPr>
+            <a:r>
+              <a:rPr sz="1600" b="0" i="0">
+                <a:solidFill>
+                  <a:srgbClr val="2B2B2B"/>
+                </a:solidFill>
+                <a:latin typeface="Calibri"/>
+              </a:rPr>
+              <a:t>–   ¿Descargué el PDF, lo nombré S11_CierreTG2_Apellido y lo subí a CDigital?</a:t>
             </a:r>
           </a:p>
         </p:txBody>
@@ -6965,6 +7043,1994 @@
 </file>
 
 <file path=ppt/slides/slide19.xml><?xml version="1.0" encoding="utf-8"?>
+<p:sld xmlns:a="http://schemas.openxmlformats.org/drawingml/2006/main" xmlns:p="http://schemas.openxmlformats.org/presentationml/2006/main" xmlns:r="http://schemas.openxmlformats.org/officeDocument/2006/relationships">
+  <p:cSld>
+    <p:bg>
+      <p:bgPr>
+        <a:solidFill>
+          <a:srgbClr val="FFFFFF"/>
+        </a:solidFill>
+        <a:effectLst/>
+      </p:bgPr>
+    </p:bg>
+    <p:spTree>
+      <p:nvGrpSpPr>
+        <p:cNvPr id="1" name=""/>
+        <p:cNvGrpSpPr/>
+        <p:nvPr/>
+      </p:nvGrpSpPr>
+      <p:grpSpPr/>
+      <p:sp>
+        <p:nvSpPr>
+          <p:cNvPr id="2" name="Rectangle 1"/>
+          <p:cNvSpPr/>
+          <p:nvPr/>
+        </p:nvSpPr>
+        <p:spPr>
+          <a:xfrm>
+            <a:off x="0" y="0"/>
+            <a:ext cx="12191695" cy="1188720"/>
+          </a:xfrm>
+          <a:prstGeom prst="rect">
+            <a:avLst/>
+          </a:prstGeom>
+          <a:solidFill>
+            <a:srgbClr val="0C2340"/>
+          </a:solidFill>
+          <a:ln>
+            <a:noFill/>
+          </a:ln>
+          <a:effectLst/>
+        </p:spPr>
+        <p:style>
+          <a:lnRef idx="1">
+            <a:schemeClr val="accent1"/>
+          </a:lnRef>
+          <a:fillRef idx="3">
+            <a:schemeClr val="accent1"/>
+          </a:fillRef>
+          <a:effectRef idx="2">
+            <a:schemeClr val="accent1"/>
+          </a:effectRef>
+          <a:fontRef idx="minor">
+            <a:schemeClr val="lt1"/>
+          </a:fontRef>
+        </p:style>
+        <p:txBody>
+          <a:bodyPr rtlCol="0" anchor="ctr"/>
+          <a:lstStyle/>
+          <a:p>
+            <a:pPr algn="ctr"/>
+          </a:p>
+        </p:txBody>
+      </p:sp>
+      <p:sp>
+        <p:nvSpPr>
+          <p:cNvPr id="3" name="TextBox 2"/>
+          <p:cNvSpPr txBox="1"/>
+          <p:nvPr/>
+        </p:nvSpPr>
+        <p:spPr>
+          <a:xfrm>
+            <a:off x="640080" y="0"/>
+            <a:ext cx="9082735" cy="1188720"/>
+          </a:xfrm>
+          <a:prstGeom prst="rect">
+            <a:avLst/>
+          </a:prstGeom>
+          <a:noFill/>
+        </p:spPr>
+        <p:txBody>
+          <a:bodyPr wrap="square" anchor="ctr" lIns="0" rIns="0" tIns="0" bIns="0">
+            <a:spAutoFit/>
+          </a:bodyPr>
+          <a:lstStyle/>
+          <a:p>
+            <a:pPr algn="ctr"/>
+            <a:r>
+              <a:rPr sz="2600" b="1" i="0">
+                <a:solidFill>
+                  <a:srgbClr val="FFFFFF"/>
+                </a:solidFill>
+                <a:latin typeface="Calibri"/>
+              </a:rPr>
+              <a:t>Cierre del curso y puente a TG3</a:t>
+            </a:r>
+          </a:p>
+        </p:txBody>
+      </p:sp>
+      <p:sp>
+        <p:nvSpPr>
+          <p:cNvPr id="4" name="TextBox 3"/>
+          <p:cNvSpPr txBox="1"/>
+          <p:nvPr/>
+        </p:nvSpPr>
+        <p:spPr>
+          <a:xfrm>
+            <a:off x="640080" y="1691639"/>
+            <a:ext cx="10911535" cy="4617720"/>
+          </a:xfrm>
+          <a:prstGeom prst="rect">
+            <a:avLst/>
+          </a:prstGeom>
+          <a:noFill/>
+        </p:spPr>
+        <p:txBody>
+          <a:bodyPr wrap="square" anchor="t" lIns="0" rIns="0" tIns="0" bIns="0">
+            <a:spAutoFit/>
+          </a:bodyPr>
+          <a:lstStyle/>
+          <a:p>
+            <a:pPr>
+              <a:spcAft>
+                <a:spcPts val="1000"/>
+              </a:spcAft>
+            </a:pPr>
+            <a:r>
+              <a:rPr sz="1600" b="0" i="0">
+                <a:solidFill>
+                  <a:srgbClr val="2B2B2B"/>
+                </a:solidFill>
+                <a:latin typeface="Calibri"/>
+              </a:rPr>
+              <a:t>–   Tres ideas para llevarse: cerrar TG2 es dejar un avance </a:t>
+            </a:r>
+            <a:r>
+              <a:rPr sz="1600" b="1" i="0">
+                <a:solidFill>
+                  <a:srgbClr val="2B2B2B"/>
+                </a:solidFill>
+                <a:latin typeface="Calibri"/>
+              </a:rPr>
+              <a:t>limpio</a:t>
+            </a:r>
+            <a:r>
+              <a:rPr sz="1600" b="0" i="0">
+                <a:solidFill>
+                  <a:srgbClr val="2B2B2B"/>
+                </a:solidFill>
+                <a:latin typeface="Calibri"/>
+              </a:rPr>
+              <a:t>, no terminar el grado.</a:t>
+            </a:r>
+          </a:p>
+          <a:p>
+            <a:pPr lvl="1">
+              <a:spcAft>
+                <a:spcPts val="600"/>
+              </a:spcAft>
+            </a:pPr>
+            <a:r>
+              <a:rPr sz="1500" b="0" i="0">
+                <a:solidFill>
+                  <a:srgbClr val="2B2B2B"/>
+                </a:solidFill>
+                <a:latin typeface="Calibri"/>
+              </a:rPr>
+              <a:t>●   El </a:t>
+            </a:r>
+            <a:r>
+              <a:rPr sz="1500" b="1" i="0">
+                <a:solidFill>
+                  <a:srgbClr val="2B2B2B"/>
+                </a:solidFill>
+                <a:latin typeface="Calibri"/>
+              </a:rPr>
+              <a:t>checklist</a:t>
+            </a:r>
+            <a:r>
+              <a:rPr sz="1500" b="0" i="0">
+                <a:solidFill>
+                  <a:srgbClr val="2B2B2B"/>
+                </a:solidFill>
+                <a:latin typeface="Calibri"/>
+              </a:rPr>
+              <a:t> garantiza que nada quede a medias sin quedar marcado.</a:t>
+            </a:r>
+          </a:p>
+          <a:p>
+            <a:pPr lvl="1">
+              <a:spcAft>
+                <a:spcPts val="600"/>
+              </a:spcAft>
+            </a:pPr>
+            <a:r>
+              <a:rPr sz="1500" b="0" i="0">
+                <a:solidFill>
+                  <a:srgbClr val="2B2B2B"/>
+                </a:solidFill>
+                <a:latin typeface="Calibri"/>
+              </a:rPr>
+              <a:t>●   La </a:t>
+            </a:r>
+            <a:r>
+              <a:rPr sz="1500" b="1" i="0">
+                <a:solidFill>
+                  <a:srgbClr val="2B2B2B"/>
+                </a:solidFill>
+                <a:latin typeface="Calibri"/>
+              </a:rPr>
+              <a:t>lista de pendientes</a:t>
+            </a:r>
+            <a:r>
+              <a:rPr sz="1500" b="0" i="0">
+                <a:solidFill>
+                  <a:srgbClr val="2B2B2B"/>
+                </a:solidFill>
+                <a:latin typeface="Calibri"/>
+              </a:rPr>
+              <a:t> es el puente: en TG3 usted retoma exactamente desde ahí.</a:t>
+            </a:r>
+          </a:p>
+          <a:p>
+            <a:pPr>
+              <a:spcAft>
+                <a:spcPts val="1000"/>
+              </a:spcAft>
+            </a:pPr>
+            <a:r>
+              <a:rPr sz="1600" b="0" i="0">
+                <a:solidFill>
+                  <a:srgbClr val="2B2B2B"/>
+                </a:solidFill>
+                <a:latin typeface="Calibri"/>
+              </a:rPr>
+              <a:t>–   Suba a CDigital la versión limpia, el checklist recorrido y la lista de pendientes.</a:t>
+            </a:r>
+          </a:p>
+          <a:p>
+            <a:pPr>
+              <a:spcAft>
+                <a:spcPts val="1000"/>
+              </a:spcAft>
+            </a:pPr>
+            <a:r>
+              <a:rPr sz="1600" b="0" i="0">
+                <a:solidFill>
+                  <a:srgbClr val="2B2B2B"/>
+                </a:solidFill>
+                <a:latin typeface="Calibri"/>
+              </a:rPr>
+              <a:t>–   Revise en </a:t>
+            </a:r>
+            <a:r>
+              <a:rPr sz="1600" b="1" i="0">
+                <a:solidFill>
+                  <a:srgbClr val="2B2B2B"/>
+                </a:solidFill>
+                <a:latin typeface="Calibri"/>
+              </a:rPr>
+              <a:t>CDigital</a:t>
+            </a:r>
+            <a:r>
+              <a:rPr sz="1600" b="0" i="0">
+                <a:solidFill>
+                  <a:srgbClr val="2B2B2B"/>
+                </a:solidFill>
+                <a:latin typeface="Calibri"/>
+              </a:rPr>
+              <a:t> las indicaciones de las sesiones de trabajo autónomo y de la entrega final del avance.</a:t>
+            </a:r>
+          </a:p>
+          <a:p>
+            <a:pPr>
+              <a:spcAft>
+                <a:spcPts val="1000"/>
+              </a:spcAft>
+            </a:pPr>
+            <a:r>
+              <a:rPr sz="1600" b="0" i="0">
+                <a:solidFill>
+                  <a:srgbClr val="2B2B2B"/>
+                </a:solidFill>
+                <a:latin typeface="Calibri"/>
+              </a:rPr>
+              <a:t>–   Guarde el documento en su unidad personal y descargue una copia en PDF: no dependa de un solo lugar.</a:t>
+            </a:r>
+          </a:p>
+          <a:p>
+            <a:pPr>
+              <a:spcAft>
+                <a:spcPts val="1000"/>
+              </a:spcAft>
+            </a:pPr>
+            <a:r>
+              <a:rPr sz="1600" b="0" i="0">
+                <a:solidFill>
+                  <a:srgbClr val="2B2B2B"/>
+                </a:solidFill>
+                <a:latin typeface="Calibri"/>
+              </a:rPr>
+              <a:t>–   Llegaron al curso con un proyecto disperso y se van con un avance ordenado y con una ruta escrita. Eso era exactamente lo que TG2 debía lograr.</a:t>
+            </a:r>
+          </a:p>
+          <a:p>
+            <a:pPr lvl="1">
+              <a:spcAft>
+                <a:spcPts val="600"/>
+              </a:spcAft>
+            </a:pPr>
+            <a:r>
+              <a:rPr sz="1500" b="0" i="0">
+                <a:solidFill>
+                  <a:srgbClr val="2B2B2B"/>
+                </a:solidFill>
+                <a:latin typeface="Calibri"/>
+              </a:rPr>
+              <a:t>●   Nos vemos en Trabajo de Grado 3, retomando desde su propia lista de pendientes.</a:t>
+            </a:r>
+          </a:p>
+        </p:txBody>
+      </p:sp>
+      <p:sp>
+        <p:nvSpPr>
+          <p:cNvPr id="5" name="TextBox 4"/>
+          <p:cNvSpPr txBox="1"/>
+          <p:nvPr/>
+        </p:nvSpPr>
+        <p:spPr>
+          <a:xfrm>
+            <a:off x="11094415" y="6446520"/>
+            <a:ext cx="548640" cy="274320"/>
+          </a:xfrm>
+          <a:prstGeom prst="rect">
+            <a:avLst/>
+          </a:prstGeom>
+          <a:noFill/>
+        </p:spPr>
+        <p:txBody>
+          <a:bodyPr wrap="square" anchor="t" lIns="0" rIns="0" tIns="0" bIns="0">
+            <a:spAutoFit/>
+          </a:bodyPr>
+          <a:lstStyle/>
+          <a:p>
+            <a:pPr algn="r"/>
+            <a:r>
+              <a:rPr sz="1000" b="1" i="0">
+                <a:solidFill>
+                  <a:srgbClr val="8F989D"/>
+                </a:solidFill>
+                <a:latin typeface="Calibri"/>
+              </a:rPr>
+              <a:t>19</a:t>
+            </a:r>
+          </a:p>
+        </p:txBody>
+      </p:sp>
+    </p:spTree>
+  </p:cSld>
+  <p:clrMapOvr>
+    <a:masterClrMapping/>
+  </p:clrMapOvr>
+</p:sld>
+</file>
+
+<file path=ppt/slides/slide2.xml><?xml version="1.0" encoding="utf-8"?>
+<p:sld xmlns:a="http://schemas.openxmlformats.org/drawingml/2006/main" xmlns:p="http://schemas.openxmlformats.org/presentationml/2006/main" xmlns:r="http://schemas.openxmlformats.org/officeDocument/2006/relationships">
+  <p:cSld>
+    <p:bg>
+      <p:bgPr>
+        <a:solidFill>
+          <a:srgbClr val="FFFFFF"/>
+        </a:solidFill>
+        <a:effectLst/>
+      </p:bgPr>
+    </p:bg>
+    <p:spTree>
+      <p:nvGrpSpPr>
+        <p:cNvPr id="1" name=""/>
+        <p:cNvGrpSpPr/>
+        <p:nvPr/>
+      </p:nvGrpSpPr>
+      <p:grpSpPr/>
+      <p:sp>
+        <p:nvSpPr>
+          <p:cNvPr id="2" name="Rectangle 1"/>
+          <p:cNvSpPr/>
+          <p:nvPr/>
+        </p:nvSpPr>
+        <p:spPr>
+          <a:xfrm>
+            <a:off x="0" y="0"/>
+            <a:ext cx="12191695" cy="1188720"/>
+          </a:xfrm>
+          <a:prstGeom prst="rect">
+            <a:avLst/>
+          </a:prstGeom>
+          <a:solidFill>
+            <a:srgbClr val="0C2340"/>
+          </a:solidFill>
+          <a:ln>
+            <a:noFill/>
+          </a:ln>
+          <a:effectLst/>
+        </p:spPr>
+        <p:style>
+          <a:lnRef idx="1">
+            <a:schemeClr val="accent1"/>
+          </a:lnRef>
+          <a:fillRef idx="3">
+            <a:schemeClr val="accent1"/>
+          </a:fillRef>
+          <a:effectRef idx="2">
+            <a:schemeClr val="accent1"/>
+          </a:effectRef>
+          <a:fontRef idx="minor">
+            <a:schemeClr val="lt1"/>
+          </a:fontRef>
+        </p:style>
+        <p:txBody>
+          <a:bodyPr rtlCol="0" anchor="ctr"/>
+          <a:lstStyle/>
+          <a:p>
+            <a:pPr algn="ctr"/>
+          </a:p>
+        </p:txBody>
+      </p:sp>
+      <p:sp>
+        <p:nvSpPr>
+          <p:cNvPr id="3" name="TextBox 2"/>
+          <p:cNvSpPr txBox="1"/>
+          <p:nvPr/>
+        </p:nvSpPr>
+        <p:spPr>
+          <a:xfrm>
+            <a:off x="640080" y="0"/>
+            <a:ext cx="9082735" cy="1188720"/>
+          </a:xfrm>
+          <a:prstGeom prst="rect">
+            <a:avLst/>
+          </a:prstGeom>
+          <a:noFill/>
+        </p:spPr>
+        <p:txBody>
+          <a:bodyPr wrap="square" anchor="ctr" lIns="0" rIns="0" tIns="0" bIns="0">
+            <a:spAutoFit/>
+          </a:bodyPr>
+          <a:lstStyle/>
+          <a:p>
+            <a:pPr algn="ctr"/>
+            <a:r>
+              <a:rPr sz="2600" b="1" i="0">
+                <a:solidFill>
+                  <a:srgbClr val="FFFFFF"/>
+                </a:solidFill>
+                <a:latin typeface="Calibri"/>
+              </a:rPr>
+              <a:t>Cerrar TG2 no es terminar el trabajo de grado</a:t>
+            </a:r>
+          </a:p>
+        </p:txBody>
+      </p:sp>
+      <p:sp>
+        <p:nvSpPr>
+          <p:cNvPr id="4" name="TextBox 3"/>
+          <p:cNvSpPr txBox="1"/>
+          <p:nvPr/>
+        </p:nvSpPr>
+        <p:spPr>
+          <a:xfrm>
+            <a:off x="640080" y="1691639"/>
+            <a:ext cx="10911535" cy="4617720"/>
+          </a:xfrm>
+          <a:prstGeom prst="rect">
+            <a:avLst/>
+          </a:prstGeom>
+          <a:noFill/>
+        </p:spPr>
+        <p:txBody>
+          <a:bodyPr wrap="square" anchor="t" lIns="0" rIns="0" tIns="0" bIns="0">
+            <a:spAutoFit/>
+          </a:bodyPr>
+          <a:lstStyle/>
+          <a:p>
+            <a:pPr>
+              <a:spcAft>
+                <a:spcPts val="1000"/>
+              </a:spcAft>
+            </a:pPr>
+            <a:r>
+              <a:rPr sz="1600" b="0" i="0">
+                <a:solidFill>
+                  <a:srgbClr val="2B2B2B"/>
+                </a:solidFill>
+                <a:latin typeface="Calibri"/>
+              </a:rPr>
+              <a:t>–   Última sesión sincrónica del curso. Conviene aclarar de entrada qué significa 'cerrar'.</a:t>
+            </a:r>
+          </a:p>
+          <a:p>
+            <a:pPr>
+              <a:spcAft>
+                <a:spcPts val="1000"/>
+              </a:spcAft>
+            </a:pPr>
+            <a:r>
+              <a:rPr sz="1600" b="0" i="0">
+                <a:solidFill>
+                  <a:srgbClr val="2B2B2B"/>
+                </a:solidFill>
+                <a:latin typeface="Calibri"/>
+              </a:rPr>
+              <a:t>–   </a:t>
+            </a:r>
+            <a:r>
+              <a:rPr sz="1600" b="1" i="0">
+                <a:solidFill>
+                  <a:srgbClr val="2B2B2B"/>
+                </a:solidFill>
+                <a:latin typeface="Calibri"/>
+              </a:rPr>
+              <a:t>Cerrar TG2 es</a:t>
+            </a:r>
+            <a:r>
+              <a:rPr sz="1600" b="0" i="0">
+                <a:solidFill>
+                  <a:srgbClr val="2B2B2B"/>
+                </a:solidFill>
+                <a:latin typeface="Calibri"/>
+              </a:rPr>
+              <a:t> dejar un avance </a:t>
+            </a:r>
+            <a:r>
+              <a:rPr sz="1600" b="1" i="0">
+                <a:solidFill>
+                  <a:srgbClr val="2B2B2B"/>
+                </a:solidFill>
+                <a:latin typeface="Calibri"/>
+              </a:rPr>
+              <a:t>limpio y coherente</a:t>
+            </a:r>
+            <a:r>
+              <a:rPr sz="1600" b="0" i="0">
+                <a:solidFill>
+                  <a:srgbClr val="2B2B2B"/>
+                </a:solidFill>
+                <a:latin typeface="Calibri"/>
+              </a:rPr>
+              <a:t>: planteamiento, pregunta, objetivos, marco y metodología propuesta.</a:t>
+            </a:r>
+          </a:p>
+          <a:p>
+            <a:pPr>
+              <a:spcAft>
+                <a:spcPts val="1000"/>
+              </a:spcAft>
+            </a:pPr>
+            <a:r>
+              <a:rPr sz="1600" b="0" i="0">
+                <a:solidFill>
+                  <a:srgbClr val="2B2B2B"/>
+                </a:solidFill>
+                <a:latin typeface="Calibri"/>
+              </a:rPr>
+              <a:t>–   </a:t>
+            </a:r>
+            <a:r>
+              <a:rPr sz="1600" b="1" i="0">
+                <a:solidFill>
+                  <a:srgbClr val="2B2B2B"/>
+                </a:solidFill>
+                <a:latin typeface="Calibri"/>
+              </a:rPr>
+              <a:t>Cerrar TG2 no es</a:t>
+            </a:r>
+            <a:r>
+              <a:rPr sz="1600" b="0" i="0">
+                <a:solidFill>
+                  <a:srgbClr val="2B2B2B"/>
+                </a:solidFill>
+                <a:latin typeface="Calibri"/>
+              </a:rPr>
+              <a:t> haber terminado el trabajo de grado: faltan aplicar los instrumentos, recoger datos, analizarlos, escribir resultados y sustentar.</a:t>
+            </a:r>
+          </a:p>
+          <a:p>
+            <a:pPr lvl="1">
+              <a:spcAft>
+                <a:spcPts val="600"/>
+              </a:spcAft>
+            </a:pPr>
+            <a:r>
+              <a:rPr sz="1500" b="0" i="0">
+                <a:solidFill>
+                  <a:srgbClr val="2B2B2B"/>
+                </a:solidFill>
+                <a:latin typeface="Calibri"/>
+              </a:rPr>
+              <a:t>●   Todo eso es TG3, y llega en el próximo periodo. Hoy se prepara el terreno para que allá solo haya que ejecutar.</a:t>
+            </a:r>
+          </a:p>
+          <a:p>
+            <a:pPr>
+              <a:spcAft>
+                <a:spcPts val="1000"/>
+              </a:spcAft>
+            </a:pPr>
+            <a:r>
+              <a:rPr sz="1600" b="0" i="0">
+                <a:solidFill>
+                  <a:srgbClr val="2B2B2B"/>
+                </a:solidFill>
+                <a:latin typeface="Calibri"/>
+              </a:rPr>
+              <a:t>–   Piénselo así: usted entrega un documento que </a:t>
+            </a:r>
+            <a:r>
+              <a:rPr sz="1600" b="1" i="0">
+                <a:solidFill>
+                  <a:srgbClr val="2B2B2B"/>
+                </a:solidFill>
+                <a:latin typeface="Calibri"/>
+              </a:rPr>
+              <a:t>cualquier otra persona podría continuar</a:t>
+            </a:r>
+            <a:r>
+              <a:rPr sz="1600" b="0" i="0">
+                <a:solidFill>
+                  <a:srgbClr val="2B2B2B"/>
+                </a:solidFill>
+                <a:latin typeface="Calibri"/>
+              </a:rPr>
+              <a:t> sin llamarlo.</a:t>
+            </a:r>
+          </a:p>
+          <a:p>
+            <a:pPr lvl="1">
+              <a:spcAft>
+                <a:spcPts val="600"/>
+              </a:spcAft>
+            </a:pPr>
+            <a:r>
+              <a:rPr sz="1500" b="0" i="0">
+                <a:solidFill>
+                  <a:srgbClr val="2B2B2B"/>
+                </a:solidFill>
+                <a:latin typeface="Calibri"/>
+              </a:rPr>
+              <a:t>●   Ese es el estándar real de un avance bien cerrado.</a:t>
+            </a:r>
+          </a:p>
+          <a:p>
+            <a:pPr>
+              <a:spcAft>
+                <a:spcPts val="1000"/>
+              </a:spcAft>
+            </a:pPr>
+            <a:r>
+              <a:rPr sz="1600" b="0" i="0">
+                <a:solidFill>
+                  <a:srgbClr val="2B2B2B"/>
+                </a:solidFill>
+                <a:latin typeface="Calibri"/>
+              </a:rPr>
+              <a:t>–   Dos productos hoy: la </a:t>
+            </a:r>
+            <a:r>
+              <a:rPr sz="1600" b="1" i="0">
+                <a:solidFill>
+                  <a:srgbClr val="2B2B2B"/>
+                </a:solidFill>
+                <a:latin typeface="Calibri"/>
+              </a:rPr>
+              <a:t>versión limpia</a:t>
+            </a:r>
+            <a:r>
+              <a:rPr sz="1600" b="0" i="0">
+                <a:solidFill>
+                  <a:srgbClr val="2B2B2B"/>
+                </a:solidFill>
+                <a:latin typeface="Calibri"/>
+              </a:rPr>
+              <a:t> del documento y la </a:t>
+            </a:r>
+            <a:r>
+              <a:rPr sz="1600" b="1" i="0">
+                <a:solidFill>
+                  <a:srgbClr val="2B2B2B"/>
+                </a:solidFill>
+                <a:latin typeface="Calibri"/>
+              </a:rPr>
+              <a:t>lista de pendientes para TG3</a:t>
+            </a:r>
+            <a:r>
+              <a:rPr sz="1600" b="0" i="0">
+                <a:solidFill>
+                  <a:srgbClr val="2B2B2B"/>
+                </a:solidFill>
+                <a:latin typeface="Calibri"/>
+              </a:rPr>
+              <a:t>.</a:t>
+            </a:r>
+          </a:p>
+        </p:txBody>
+      </p:sp>
+      <p:sp>
+        <p:nvSpPr>
+          <p:cNvPr id="5" name="TextBox 4"/>
+          <p:cNvSpPr txBox="1"/>
+          <p:nvPr/>
+        </p:nvSpPr>
+        <p:spPr>
+          <a:xfrm>
+            <a:off x="11094415" y="6446520"/>
+            <a:ext cx="548640" cy="274320"/>
+          </a:xfrm>
+          <a:prstGeom prst="rect">
+            <a:avLst/>
+          </a:prstGeom>
+          <a:noFill/>
+        </p:spPr>
+        <p:txBody>
+          <a:bodyPr wrap="square" anchor="t" lIns="0" rIns="0" tIns="0" bIns="0">
+            <a:spAutoFit/>
+          </a:bodyPr>
+          <a:lstStyle/>
+          <a:p>
+            <a:pPr algn="r"/>
+            <a:r>
+              <a:rPr sz="1000" b="1" i="0">
+                <a:solidFill>
+                  <a:srgbClr val="8F989D"/>
+                </a:solidFill>
+                <a:latin typeface="Calibri"/>
+              </a:rPr>
+              <a:t>2</a:t>
+            </a:r>
+          </a:p>
+        </p:txBody>
+      </p:sp>
+      <p:sp>
+        <p:nvSpPr>
+          <p:cNvPr id="6" name="TextBox 5"/>
+          <p:cNvSpPr txBox="1"/>
+          <p:nvPr/>
+        </p:nvSpPr>
+        <p:spPr>
+          <a:xfrm>
+            <a:off x="640080" y="5943600"/>
+            <a:ext cx="9997135" cy="457200"/>
+          </a:xfrm>
+          <a:prstGeom prst="rect">
+            <a:avLst/>
+          </a:prstGeom>
+          <a:noFill/>
+        </p:spPr>
+        <p:txBody>
+          <a:bodyPr wrap="square" anchor="t" lIns="0" rIns="0" tIns="0" bIns="0">
+            <a:spAutoFit/>
+          </a:bodyPr>
+          <a:lstStyle/>
+          <a:p>
+            <a:r>
+              <a:rPr sz="1200" b="0" i="1">
+                <a:solidFill>
+                  <a:srgbClr val="2B2B2B"/>
+                </a:solidFill>
+                <a:latin typeface="Calibri"/>
+              </a:rPr>
+              <a:t>Salida esperada: checklist de cierre recorrido, documento con formato de la Plantilla APA CUN y pendientes escritos en imperativo.</a:t>
+            </a:r>
+          </a:p>
+        </p:txBody>
+      </p:sp>
+    </p:spTree>
+  </p:cSld>
+  <p:clrMapOvr>
+    <a:masterClrMapping/>
+  </p:clrMapOvr>
+</p:sld>
+</file>
+
+<file path=ppt/slides/slide20.xml><?xml version="1.0" encoding="utf-8"?>
+<p:sld xmlns:a="http://schemas.openxmlformats.org/drawingml/2006/main" xmlns:p="http://schemas.openxmlformats.org/presentationml/2006/main" xmlns:r="http://schemas.openxmlformats.org/officeDocument/2006/relationships">
+  <p:cSld>
+    <p:bg>
+      <p:bgPr>
+        <a:solidFill>
+          <a:srgbClr val="FFFFFF"/>
+        </a:solidFill>
+        <a:effectLst/>
+      </p:bgPr>
+    </p:bg>
+    <p:spTree>
+      <p:nvGrpSpPr>
+        <p:cNvPr id="1" name=""/>
+        <p:cNvGrpSpPr/>
+        <p:nvPr/>
+      </p:nvGrpSpPr>
+      <p:grpSpPr/>
+      <p:sp>
+        <p:nvSpPr>
+          <p:cNvPr id="2" name="Rectangle 1"/>
+          <p:cNvSpPr/>
+          <p:nvPr/>
+        </p:nvSpPr>
+        <p:spPr>
+          <a:xfrm>
+            <a:off x="0" y="0"/>
+            <a:ext cx="12191695" cy="1188720"/>
+          </a:xfrm>
+          <a:prstGeom prst="rect">
+            <a:avLst/>
+          </a:prstGeom>
+          <a:solidFill>
+            <a:srgbClr val="0C2340"/>
+          </a:solidFill>
+          <a:ln>
+            <a:noFill/>
+          </a:ln>
+          <a:effectLst/>
+        </p:spPr>
+        <p:style>
+          <a:lnRef idx="1">
+            <a:schemeClr val="accent1"/>
+          </a:lnRef>
+          <a:fillRef idx="3">
+            <a:schemeClr val="accent1"/>
+          </a:fillRef>
+          <a:effectRef idx="2">
+            <a:schemeClr val="accent1"/>
+          </a:effectRef>
+          <a:fontRef idx="minor">
+            <a:schemeClr val="lt1"/>
+          </a:fontRef>
+        </p:style>
+        <p:txBody>
+          <a:bodyPr rtlCol="0" anchor="ctr"/>
+          <a:lstStyle/>
+          <a:p>
+            <a:pPr algn="ctr"/>
+          </a:p>
+        </p:txBody>
+      </p:sp>
+      <p:sp>
+        <p:nvSpPr>
+          <p:cNvPr id="3" name="TextBox 2"/>
+          <p:cNvSpPr txBox="1"/>
+          <p:nvPr/>
+        </p:nvSpPr>
+        <p:spPr>
+          <a:xfrm>
+            <a:off x="640080" y="0"/>
+            <a:ext cx="9082735" cy="1188720"/>
+          </a:xfrm>
+          <a:prstGeom prst="rect">
+            <a:avLst/>
+          </a:prstGeom>
+          <a:noFill/>
+        </p:spPr>
+        <p:txBody>
+          <a:bodyPr wrap="square" anchor="ctr" lIns="0" rIns="0" tIns="0" bIns="0">
+            <a:spAutoFit/>
+          </a:bodyPr>
+          <a:lstStyle/>
+          <a:p>
+            <a:pPr algn="ctr"/>
+            <a:r>
+              <a:rPr sz="2600" b="1" i="0">
+                <a:solidFill>
+                  <a:srgbClr val="FFFFFF"/>
+                </a:solidFill>
+                <a:latin typeface="Calibri"/>
+              </a:rPr>
+              <a:t>RUTA DE ENTREGABLES DEL CURSO</a:t>
+            </a:r>
+          </a:p>
+        </p:txBody>
+      </p:sp>
+      <p:sp>
+        <p:nvSpPr>
+          <p:cNvPr id="4" name="TextBox 3"/>
+          <p:cNvSpPr txBox="1"/>
+          <p:nvPr/>
+        </p:nvSpPr>
+        <p:spPr>
+          <a:xfrm>
+            <a:off x="640080" y="1280160"/>
+            <a:ext cx="10911535" cy="411480"/>
+          </a:xfrm>
+          <a:prstGeom prst="rect">
+            <a:avLst/>
+          </a:prstGeom>
+          <a:noFill/>
+        </p:spPr>
+        <p:txBody>
+          <a:bodyPr wrap="square" anchor="t" lIns="0" rIns="0" tIns="0" bIns="0">
+            <a:spAutoFit/>
+          </a:bodyPr>
+          <a:lstStyle/>
+          <a:p>
+            <a:pPr algn="ctr"/>
+            <a:r>
+              <a:rPr sz="1500" b="0" i="0">
+                <a:solidFill>
+                  <a:srgbClr val="2B2B2B"/>
+                </a:solidFill>
+                <a:latin typeface="Calibri"/>
+              </a:rPr>
+              <a:t>Sin fechas a propósito: aquí va </a:t>
+            </a:r>
+            <a:r>
+              <a:rPr sz="1500" b="1" i="0">
+                <a:solidFill>
+                  <a:srgbClr val="2B2B2B"/>
+                </a:solidFill>
+                <a:latin typeface="Calibri"/>
+              </a:rPr>
+              <a:t>en qué punto del curso</a:t>
+            </a:r>
+            <a:r>
+              <a:rPr sz="1500" b="0" i="0">
+                <a:solidFill>
+                  <a:srgbClr val="2B2B2B"/>
+                </a:solidFill>
+                <a:latin typeface="Calibri"/>
+              </a:rPr>
+              <a:t> cierra cada ítem · la ventana exacta la fija CDigital</a:t>
+            </a:r>
+          </a:p>
+        </p:txBody>
+      </p:sp>
+      <p:graphicFrame>
+        <p:nvGraphicFramePr>
+          <p:cNvPr id="5" name="Table 4"/>
+          <p:cNvGraphicFramePr>
+            <a:graphicFrameLocks noGrp="1"/>
+          </p:cNvGraphicFramePr>
+          <p:nvPr/>
+        </p:nvGraphicFramePr>
+        <p:xfrm>
+          <a:off x="640080" y="2011679"/>
+          <a:ext cx="10911533" cy="4297680"/>
+        </p:xfrm>
+        <a:graphic>
+          <a:graphicData uri="http://schemas.openxmlformats.org/drawingml/2006/table">
+            <a:tbl>
+              <a:tblPr>
+                <a:tableStyleId>{2D5ABB26-0587-4C30-8999-92F81FD0307C}</a:tableStyleId>
+              </a:tblPr>
+              <a:tblGrid>
+                <a:gridCol w="2659113"/>
+                <a:gridCol w="2659113"/>
+                <a:gridCol w="5593307"/>
+              </a:tblGrid>
+              <a:tr h="477520">
+                <a:tc>
+                  <a:txBody>
+                    <a:bodyPr/>
+                    <a:lstStyle/>
+                    <a:p>
+                      <a:pPr algn="l"/>
+                      <a:r>
+                        <a:rPr sz="1300" b="1" i="0">
+                          <a:solidFill>
+                            <a:srgbClr val="FFFFFF"/>
+                          </a:solidFill>
+                          <a:latin typeface="Calibri"/>
+                        </a:rPr>
+                        <a:t>Cierra en la semana de…</a:t>
+                      </a:r>
+                    </a:p>
+                  </a:txBody>
+                  <a:tcPr anchor="ctr" marL="109728" marR="91440" marT="36576" marB="36576">
+                    <a:solidFill>
+                      <a:srgbClr val="0C2340"/>
+                    </a:solidFill>
+                  </a:tcPr>
+                </a:tc>
+                <a:tc>
+                  <a:txBody>
+                    <a:bodyPr/>
+                    <a:lstStyle/>
+                    <a:p>
+                      <a:pPr algn="l"/>
+                      <a:r>
+                        <a:rPr sz="1300" b="1" i="0">
+                          <a:solidFill>
+                            <a:srgbClr val="FFFFFF"/>
+                          </a:solidFill>
+                          <a:latin typeface="Calibri"/>
+                        </a:rPr>
+                        <a:t>Entregable</a:t>
+                      </a:r>
+                    </a:p>
+                  </a:txBody>
+                  <a:tcPr anchor="ctr" marL="109728" marR="91440" marT="36576" marB="36576">
+                    <a:solidFill>
+                      <a:srgbClr val="0C2340"/>
+                    </a:solidFill>
+                  </a:tcPr>
+                </a:tc>
+                <a:tc>
+                  <a:txBody>
+                    <a:bodyPr/>
+                    <a:lstStyle/>
+                    <a:p>
+                      <a:pPr algn="l"/>
+                      <a:r>
+                        <a:rPr sz="1300" b="1" i="0">
+                          <a:solidFill>
+                            <a:srgbClr val="FFFFFF"/>
+                          </a:solidFill>
+                          <a:latin typeface="Calibri"/>
+                        </a:rPr>
+                        <a:t>Qué debes tener listo</a:t>
+                      </a:r>
+                    </a:p>
+                  </a:txBody>
+                  <a:tcPr anchor="ctr" marL="109728" marR="91440" marT="36576" marB="36576">
+                    <a:solidFill>
+                      <a:srgbClr val="0C2340"/>
+                    </a:solidFill>
+                  </a:tcPr>
+                </a:tc>
+              </a:tr>
+              <a:tr h="477520">
+                <a:tc>
+                  <a:txBody>
+                    <a:bodyPr/>
+                    <a:lstStyle/>
+                    <a:p>
+                      <a:pPr algn="l"/>
+                      <a:r>
+                        <a:rPr sz="1100" b="1" i="0">
+                          <a:solidFill>
+                            <a:srgbClr val="2B2B2B"/>
+                          </a:solidFill>
+                          <a:latin typeface="Calibri"/>
+                        </a:rPr>
+                        <a:t>Sesión 03</a:t>
+                      </a:r>
+                      <a:r>
+                        <a:rPr sz="1100" b="0" i="0">
+                          <a:solidFill>
+                            <a:srgbClr val="2B2B2B"/>
+                          </a:solidFill>
+                          <a:latin typeface="Calibri"/>
+                        </a:rPr>
+                        <a:t> · ya cerró</a:t>
+                      </a:r>
+                    </a:p>
+                  </a:txBody>
+                  <a:tcPr anchor="ctr" marL="109728" marR="91440" marT="36576" marB="36576">
+                    <a:solidFill>
+                      <a:srgbClr val="FFFFFF"/>
+                    </a:solidFill>
+                  </a:tcPr>
+                </a:tc>
+                <a:tc>
+                  <a:txBody>
+                    <a:bodyPr/>
+                    <a:lstStyle/>
+                    <a:p>
+                      <a:pPr algn="l"/>
+                      <a:r>
+                        <a:rPr sz="1100" b="1" i="0">
+                          <a:solidFill>
+                            <a:srgbClr val="2B2B2B"/>
+                          </a:solidFill>
+                          <a:latin typeface="Calibri"/>
+                        </a:rPr>
+                        <a:t>Quiz 1</a:t>
+                      </a:r>
+                      <a:r>
+                        <a:rPr sz="1100" b="0" i="0">
+                          <a:solidFill>
+                            <a:srgbClr val="2B2B2B"/>
+                          </a:solidFill>
+                          <a:latin typeface="Calibri"/>
+                        </a:rPr>
+                        <a:t> · Cuestionario · 6%</a:t>
+                      </a:r>
+                    </a:p>
+                  </a:txBody>
+                  <a:tcPr anchor="ctr" marL="109728" marR="91440" marT="36576" marB="36576">
+                    <a:solidFill>
+                      <a:srgbClr val="FFFFFF"/>
+                    </a:solidFill>
+                  </a:tcPr>
+                </a:tc>
+                <a:tc>
+                  <a:txBody>
+                    <a:bodyPr/>
+                    <a:lstStyle/>
+                    <a:p>
+                      <a:pPr algn="l"/>
+                      <a:r>
+                        <a:rPr sz="1100" b="0" i="0">
+                          <a:solidFill>
+                            <a:srgbClr val="2B2B2B"/>
+                          </a:solidFill>
+                          <a:latin typeface="Calibri"/>
+                        </a:rPr>
+                        <a:t>Ten formulados </a:t>
+                      </a:r>
+                      <a:r>
+                        <a:rPr sz="1100" b="1" i="0">
+                          <a:solidFill>
+                            <a:srgbClr val="2B2B2B"/>
+                          </a:solidFill>
+                          <a:latin typeface="Calibri"/>
+                        </a:rPr>
+                        <a:t>pregunta, objetivos y título</a:t>
+                      </a:r>
+                      <a:r>
+                        <a:rPr sz="1100" b="0" i="0">
+                          <a:solidFill>
+                            <a:srgbClr val="2B2B2B"/>
+                          </a:solidFill>
+                          <a:latin typeface="Calibri"/>
+                        </a:rPr>
+                        <a:t> provisional.</a:t>
+                      </a:r>
+                    </a:p>
+                  </a:txBody>
+                  <a:tcPr anchor="ctr" marL="109728" marR="91440" marT="36576" marB="36576">
+                    <a:solidFill>
+                      <a:srgbClr val="FFFFFF"/>
+                    </a:solidFill>
+                  </a:tcPr>
+                </a:tc>
+              </a:tr>
+              <a:tr h="477520">
+                <a:tc>
+                  <a:txBody>
+                    <a:bodyPr/>
+                    <a:lstStyle/>
+                    <a:p>
+                      <a:pPr algn="l"/>
+                      <a:r>
+                        <a:rPr sz="1100" b="1" i="0">
+                          <a:solidFill>
+                            <a:srgbClr val="2B2B2B"/>
+                          </a:solidFill>
+                          <a:latin typeface="Calibri"/>
+                        </a:rPr>
+                        <a:t>Sesión 05</a:t>
+                      </a:r>
+                      <a:r>
+                        <a:rPr sz="1100" b="0" i="0">
+                          <a:solidFill>
+                            <a:srgbClr val="2B2B2B"/>
+                          </a:solidFill>
+                          <a:latin typeface="Calibri"/>
+                        </a:rPr>
+                        <a:t> · ya cerró</a:t>
+                      </a:r>
+                    </a:p>
+                  </a:txBody>
+                  <a:tcPr anchor="ctr" marL="109728" marR="91440" marT="36576" marB="36576">
+                    <a:solidFill>
+                      <a:srgbClr val="F2F2F2"/>
+                    </a:solidFill>
+                  </a:tcPr>
+                </a:tc>
+                <a:tc>
+                  <a:txBody>
+                    <a:bodyPr/>
+                    <a:lstStyle/>
+                    <a:p>
+                      <a:pPr algn="l"/>
+                      <a:r>
+                        <a:rPr sz="1100" b="1" i="0">
+                          <a:solidFill>
+                            <a:srgbClr val="2B2B2B"/>
+                          </a:solidFill>
+                          <a:latin typeface="Calibri"/>
+                        </a:rPr>
+                        <a:t>Parcial 1</a:t>
+                      </a:r>
+                      <a:r>
+                        <a:rPr sz="1100" b="0" i="0">
+                          <a:solidFill>
+                            <a:srgbClr val="2B2B2B"/>
+                          </a:solidFill>
+                          <a:latin typeface="Calibri"/>
+                        </a:rPr>
+                        <a:t> · Cuestionario · 24%</a:t>
+                      </a:r>
+                    </a:p>
+                  </a:txBody>
+                  <a:tcPr anchor="ctr" marL="109728" marR="91440" marT="36576" marB="36576">
+                    <a:solidFill>
+                      <a:srgbClr val="F2F2F2"/>
+                    </a:solidFill>
+                  </a:tcPr>
+                </a:tc>
+                <a:tc>
+                  <a:txBody>
+                    <a:bodyPr/>
+                    <a:lstStyle/>
+                    <a:p>
+                      <a:pPr algn="l"/>
+                      <a:r>
+                        <a:rPr sz="1100" b="0" i="0">
+                          <a:solidFill>
+                            <a:srgbClr val="2B2B2B"/>
+                          </a:solidFill>
+                          <a:latin typeface="Calibri"/>
+                        </a:rPr>
+                        <a:t>Repasa </a:t>
+                      </a:r>
+                      <a:r>
+                        <a:rPr sz="1100" b="1" i="0">
+                          <a:solidFill>
+                            <a:srgbClr val="2B2B2B"/>
+                          </a:solidFill>
+                          <a:latin typeface="Calibri"/>
+                        </a:rPr>
+                        <a:t>estructura APA CUN</a:t>
+                      </a:r>
+                      <a:r>
+                        <a:rPr sz="1100" b="0" i="0">
+                          <a:solidFill>
+                            <a:srgbClr val="2B2B2B"/>
+                          </a:solidFill>
+                          <a:latin typeface="Calibri"/>
+                        </a:rPr>
+                        <a:t> y antecedentes Fase I, más pregunta, objetivos y título.</a:t>
+                      </a:r>
+                    </a:p>
+                  </a:txBody>
+                  <a:tcPr anchor="ctr" marL="109728" marR="91440" marT="36576" marB="36576">
+                    <a:solidFill>
+                      <a:srgbClr val="F2F2F2"/>
+                    </a:solidFill>
+                  </a:tcPr>
+                </a:tc>
+              </a:tr>
+              <a:tr h="477520">
+                <a:tc>
+                  <a:txBody>
+                    <a:bodyPr/>
+                    <a:lstStyle/>
+                    <a:p>
+                      <a:pPr algn="l"/>
+                      <a:r>
+                        <a:rPr sz="1100" b="1" i="0">
+                          <a:solidFill>
+                            <a:srgbClr val="2B2B2B"/>
+                          </a:solidFill>
+                          <a:latin typeface="Calibri"/>
+                        </a:rPr>
+                        <a:t>Sesión 07</a:t>
+                      </a:r>
+                      <a:r>
+                        <a:rPr sz="1100" b="0" i="0">
+                          <a:solidFill>
+                            <a:srgbClr val="2B2B2B"/>
+                          </a:solidFill>
+                          <a:latin typeface="Calibri"/>
+                        </a:rPr>
+                        <a:t> · ya cerró</a:t>
+                      </a:r>
+                    </a:p>
+                  </a:txBody>
+                  <a:tcPr anchor="ctr" marL="109728" marR="91440" marT="36576" marB="36576">
+                    <a:solidFill>
+                      <a:srgbClr val="FFFFFF"/>
+                    </a:solidFill>
+                  </a:tcPr>
+                </a:tc>
+                <a:tc>
+                  <a:txBody>
+                    <a:bodyPr/>
+                    <a:lstStyle/>
+                    <a:p>
+                      <a:pPr algn="l"/>
+                      <a:r>
+                        <a:rPr sz="1100" b="1" i="0">
+                          <a:solidFill>
+                            <a:srgbClr val="2B2B2B"/>
+                          </a:solidFill>
+                          <a:latin typeface="Calibri"/>
+                        </a:rPr>
+                        <a:t>Quiz 2</a:t>
+                      </a:r>
+                      <a:r>
+                        <a:rPr sz="1100" b="0" i="0">
+                          <a:solidFill>
+                            <a:srgbClr val="2B2B2B"/>
+                          </a:solidFill>
+                          <a:latin typeface="Calibri"/>
+                        </a:rPr>
+                        <a:t> · Cuestionario · 9%</a:t>
+                      </a:r>
+                    </a:p>
+                  </a:txBody>
+                  <a:tcPr anchor="ctr" marL="109728" marR="91440" marT="36576" marB="36576">
+                    <a:solidFill>
+                      <a:srgbClr val="FFFFFF"/>
+                    </a:solidFill>
+                  </a:tcPr>
+                </a:tc>
+                <a:tc>
+                  <a:txBody>
+                    <a:bodyPr/>
+                    <a:lstStyle/>
+                    <a:p>
+                      <a:pPr algn="l"/>
+                      <a:r>
+                        <a:rPr sz="1100" b="0" i="0">
+                          <a:solidFill>
+                            <a:srgbClr val="2B2B2B"/>
+                          </a:solidFill>
+                          <a:latin typeface="Calibri"/>
+                        </a:rPr>
+                        <a:t>Distingue </a:t>
+                      </a:r>
+                      <a:r>
+                        <a:rPr sz="1100" b="1" i="0">
+                          <a:solidFill>
+                            <a:srgbClr val="2B2B2B"/>
+                          </a:solidFill>
+                          <a:latin typeface="Calibri"/>
+                        </a:rPr>
+                        <a:t>marco teórico, conceptual y contextual</a:t>
+                      </a:r>
+                      <a:r>
+                        <a:rPr sz="1100" b="0" i="0">
+                          <a:solidFill>
+                            <a:srgbClr val="2B2B2B"/>
+                          </a:solidFill>
+                          <a:latin typeface="Calibri"/>
+                        </a:rPr>
+                        <a:t> y cómo se articulan con tu pregunta.</a:t>
+                      </a:r>
+                    </a:p>
+                  </a:txBody>
+                  <a:tcPr anchor="ctr" marL="109728" marR="91440" marT="36576" marB="36576">
+                    <a:solidFill>
+                      <a:srgbClr val="FFFFFF"/>
+                    </a:solidFill>
+                  </a:tcPr>
+                </a:tc>
+              </a:tr>
+              <a:tr h="477520">
+                <a:tc>
+                  <a:txBody>
+                    <a:bodyPr/>
+                    <a:lstStyle/>
+                    <a:p>
+                      <a:pPr algn="l"/>
+                      <a:r>
+                        <a:rPr sz="1100" b="1" i="0">
+                          <a:solidFill>
+                            <a:srgbClr val="2B2B2B"/>
+                          </a:solidFill>
+                          <a:latin typeface="Calibri"/>
+                        </a:rPr>
+                        <a:t>Sesión 08</a:t>
+                      </a:r>
+                      <a:r>
+                        <a:rPr sz="1100" b="0" i="0">
+                          <a:solidFill>
+                            <a:srgbClr val="2B2B2B"/>
+                          </a:solidFill>
+                          <a:latin typeface="Calibri"/>
+                        </a:rPr>
+                        <a:t> · ya cerró</a:t>
+                      </a:r>
+                    </a:p>
+                  </a:txBody>
+                  <a:tcPr anchor="ctr" marL="109728" marR="91440" marT="36576" marB="36576">
+                    <a:solidFill>
+                      <a:srgbClr val="F2F2F2"/>
+                    </a:solidFill>
+                  </a:tcPr>
+                </a:tc>
+                <a:tc>
+                  <a:txBody>
+                    <a:bodyPr/>
+                    <a:lstStyle/>
+                    <a:p>
+                      <a:pPr algn="l"/>
+                      <a:r>
+                        <a:rPr sz="1100" b="1" i="0">
+                          <a:solidFill>
+                            <a:srgbClr val="2B2B2B"/>
+                          </a:solidFill>
+                          <a:latin typeface="Calibri"/>
+                        </a:rPr>
+                        <a:t>Parcial 2</a:t>
+                      </a:r>
+                      <a:r>
+                        <a:rPr sz="1100" b="0" i="0">
+                          <a:solidFill>
+                            <a:srgbClr val="2B2B2B"/>
+                          </a:solidFill>
+                          <a:latin typeface="Calibri"/>
+                        </a:rPr>
+                        <a:t> · Cuestionario · 21%</a:t>
+                      </a:r>
+                    </a:p>
+                  </a:txBody>
+                  <a:tcPr anchor="ctr" marL="109728" marR="91440" marT="36576" marB="36576">
+                    <a:solidFill>
+                      <a:srgbClr val="F2F2F2"/>
+                    </a:solidFill>
+                  </a:tcPr>
+                </a:tc>
+                <a:tc>
+                  <a:txBody>
+                    <a:bodyPr/>
+                    <a:lstStyle/>
+                    <a:p>
+                      <a:pPr algn="l"/>
+                      <a:r>
+                        <a:rPr sz="1100" b="0" i="0">
+                          <a:solidFill>
+                            <a:srgbClr val="2B2B2B"/>
+                          </a:solidFill>
+                          <a:latin typeface="Calibri"/>
+                        </a:rPr>
+                        <a:t>Repasa los tres marcos y el </a:t>
+                      </a:r>
+                      <a:r>
+                        <a:rPr sz="1100" b="1" i="0">
+                          <a:solidFill>
+                            <a:srgbClr val="2B2B2B"/>
+                          </a:solidFill>
+                          <a:latin typeface="Calibri"/>
+                        </a:rPr>
+                        <a:t>diseño metodológico</a:t>
+                      </a:r>
+                      <a:r>
+                        <a:rPr sz="1100" b="0" i="0">
+                          <a:solidFill>
+                            <a:srgbClr val="2B2B2B"/>
+                          </a:solidFill>
+                          <a:latin typeface="Calibri"/>
+                        </a:rPr>
+                        <a:t>: enfoque, tipo, alcance y diseño.</a:t>
+                      </a:r>
+                    </a:p>
+                  </a:txBody>
+                  <a:tcPr anchor="ctr" marL="109728" marR="91440" marT="36576" marB="36576">
+                    <a:solidFill>
+                      <a:srgbClr val="F2F2F2"/>
+                    </a:solidFill>
+                  </a:tcPr>
+                </a:tc>
+              </a:tr>
+              <a:tr h="477520">
+                <a:tc>
+                  <a:txBody>
+                    <a:bodyPr/>
+                    <a:lstStyle/>
+                    <a:p>
+                      <a:pPr algn="l"/>
+                      <a:r>
+                        <a:rPr sz="1100" b="1" i="0">
+                          <a:solidFill>
+                            <a:srgbClr val="2B2B2B"/>
+                          </a:solidFill>
+                          <a:latin typeface="Calibri"/>
+                        </a:rPr>
+                        <a:t>Sesión 10</a:t>
+                      </a:r>
+                      <a:r>
+                        <a:rPr sz="1100" b="0" i="0">
+                          <a:solidFill>
+                            <a:srgbClr val="2B2B2B"/>
+                          </a:solidFill>
+                          <a:latin typeface="Calibri"/>
+                        </a:rPr>
+                        <a:t> · ya cerró</a:t>
+                      </a:r>
+                    </a:p>
+                  </a:txBody>
+                  <a:tcPr anchor="ctr" marL="109728" marR="91440" marT="36576" marB="36576">
+                    <a:solidFill>
+                      <a:srgbClr val="FFFFFF"/>
+                    </a:solidFill>
+                  </a:tcPr>
+                </a:tc>
+                <a:tc>
+                  <a:txBody>
+                    <a:bodyPr/>
+                    <a:lstStyle/>
+                    <a:p>
+                      <a:pPr algn="l"/>
+                      <a:r>
+                        <a:rPr sz="1100" b="1" i="0">
+                          <a:solidFill>
+                            <a:srgbClr val="2B2B2B"/>
+                          </a:solidFill>
+                          <a:latin typeface="Calibri"/>
+                        </a:rPr>
+                        <a:t>Quiz 3</a:t>
+                      </a:r>
+                      <a:r>
+                        <a:rPr sz="1100" b="0" i="0">
+                          <a:solidFill>
+                            <a:srgbClr val="2B2B2B"/>
+                          </a:solidFill>
+                          <a:latin typeface="Calibri"/>
+                        </a:rPr>
+                        <a:t> · Cuestionario · 4%</a:t>
+                      </a:r>
+                    </a:p>
+                  </a:txBody>
+                  <a:tcPr anchor="ctr" marL="109728" marR="91440" marT="36576" marB="36576">
+                    <a:solidFill>
+                      <a:srgbClr val="FFFFFF"/>
+                    </a:solidFill>
+                  </a:tcPr>
+                </a:tc>
+                <a:tc>
+                  <a:txBody>
+                    <a:bodyPr/>
+                    <a:lstStyle/>
+                    <a:p>
+                      <a:pPr algn="l"/>
+                      <a:r>
+                        <a:rPr sz="1100" b="0" i="0">
+                          <a:solidFill>
+                            <a:srgbClr val="2B2B2B"/>
+                          </a:solidFill>
+                          <a:latin typeface="Calibri"/>
+                        </a:rPr>
+                        <a:t>Ten claros </a:t>
+                      </a:r>
+                      <a:r>
+                        <a:rPr sz="1100" b="1" i="0">
+                          <a:solidFill>
+                            <a:srgbClr val="2B2B2B"/>
+                          </a:solidFill>
+                          <a:latin typeface="Calibri"/>
+                        </a:rPr>
+                        <a:t>instrumentos y plan de análisis</a:t>
+                      </a:r>
+                      <a:r>
+                        <a:rPr sz="1100" b="0" i="0">
+                          <a:solidFill>
+                            <a:srgbClr val="2B2B2B"/>
+                          </a:solidFill>
+                          <a:latin typeface="Calibri"/>
+                        </a:rPr>
+                        <a:t> propuestos y la integración del avance.</a:t>
+                      </a:r>
+                    </a:p>
+                  </a:txBody>
+                  <a:tcPr anchor="ctr" marL="109728" marR="91440" marT="36576" marB="36576">
+                    <a:solidFill>
+                      <a:srgbClr val="FFFFFF"/>
+                    </a:solidFill>
+                  </a:tcPr>
+                </a:tc>
+              </a:tr>
+              <a:tr h="477520">
+                <a:tc>
+                  <a:txBody>
+                    <a:bodyPr/>
+                    <a:lstStyle/>
+                    <a:p>
+                      <a:pPr algn="l"/>
+                      <a:r>
+                        <a:rPr sz="1100" b="1" i="0">
+                          <a:solidFill>
+                            <a:srgbClr val="2B2B2B"/>
+                          </a:solidFill>
+                          <a:latin typeface="Calibri"/>
+                        </a:rPr>
+                        <a:t>Sesión 11</a:t>
+                      </a:r>
+                      <a:r>
+                        <a:rPr sz="1100" b="0" i="0">
+                          <a:solidFill>
+                            <a:srgbClr val="2B2B2B"/>
+                          </a:solidFill>
+                          <a:latin typeface="Calibri"/>
+                        </a:rPr>
+                        <a:t> · cierra esta semana</a:t>
+                      </a:r>
+                    </a:p>
+                  </a:txBody>
+                  <a:tcPr anchor="ctr" marL="109728" marR="91440" marT="36576" marB="36576">
+                    <a:solidFill>
+                      <a:srgbClr val="F2F2F2"/>
+                    </a:solidFill>
+                  </a:tcPr>
+                </a:tc>
+                <a:tc>
+                  <a:txBody>
+                    <a:bodyPr/>
+                    <a:lstStyle/>
+                    <a:p>
+                      <a:pPr algn="l"/>
+                      <a:r>
+                        <a:rPr sz="1100" b="1" i="0">
+                          <a:solidFill>
+                            <a:srgbClr val="2B2B2B"/>
+                          </a:solidFill>
+                          <a:latin typeface="Calibri"/>
+                        </a:rPr>
+                        <a:t>ACA Final</a:t>
+                      </a:r>
+                      <a:r>
+                        <a:rPr sz="1100" b="0" i="0">
+                          <a:solidFill>
+                            <a:srgbClr val="2B2B2B"/>
+                          </a:solidFill>
+                          <a:latin typeface="Calibri"/>
+                        </a:rPr>
+                        <a:t> · Tarea · 32,8%</a:t>
+                      </a:r>
+                    </a:p>
+                  </a:txBody>
+                  <a:tcPr anchor="ctr" marL="109728" marR="91440" marT="36576" marB="36576">
+                    <a:solidFill>
+                      <a:srgbClr val="F2F2F2"/>
+                    </a:solidFill>
+                  </a:tcPr>
+                </a:tc>
+                <a:tc>
+                  <a:txBody>
+                    <a:bodyPr/>
+                    <a:lstStyle/>
+                    <a:p>
+                      <a:pPr algn="l"/>
+                      <a:r>
+                        <a:rPr sz="1100" b="0" i="0">
+                          <a:solidFill>
+                            <a:srgbClr val="2B2B2B"/>
+                          </a:solidFill>
+                          <a:latin typeface="Calibri"/>
+                        </a:rPr>
+                        <a:t>Sube el </a:t>
+                      </a:r>
+                      <a:r>
+                        <a:rPr sz="1100" b="1" i="0">
+                          <a:solidFill>
+                            <a:srgbClr val="2B2B2B"/>
+                          </a:solidFill>
+                          <a:latin typeface="Calibri"/>
+                        </a:rPr>
+                        <a:t>avance consolidado</a:t>
+                      </a:r>
+                      <a:r>
+                        <a:rPr sz="1100" b="0" i="0">
+                          <a:solidFill>
+                            <a:srgbClr val="2B2B2B"/>
+                          </a:solidFill>
+                          <a:latin typeface="Calibri"/>
+                        </a:rPr>
+                        <a:t> en plantilla APA CUN, integrado y listo para TG3.</a:t>
+                      </a:r>
+                    </a:p>
+                  </a:txBody>
+                  <a:tcPr anchor="ctr" marL="109728" marR="91440" marT="36576" marB="36576">
+                    <a:solidFill>
+                      <a:srgbClr val="F2F2F2"/>
+                    </a:solidFill>
+                  </a:tcPr>
+                </a:tc>
+              </a:tr>
+              <a:tr h="477520">
+                <a:tc>
+                  <a:txBody>
+                    <a:bodyPr/>
+                    <a:lstStyle/>
+                    <a:p>
+                      <a:pPr algn="l"/>
+                      <a:r>
+                        <a:rPr sz="1100" b="1" i="0">
+                          <a:solidFill>
+                            <a:srgbClr val="2B2B2B"/>
+                          </a:solidFill>
+                          <a:latin typeface="Calibri"/>
+                        </a:rPr>
+                        <a:t>Sesión 11</a:t>
+                      </a:r>
+                      <a:r>
+                        <a:rPr sz="1100" b="0" i="0">
+                          <a:solidFill>
+                            <a:srgbClr val="2B2B2B"/>
+                          </a:solidFill>
+                          <a:latin typeface="Calibri"/>
+                        </a:rPr>
+                        <a:t> · cierra esta semana</a:t>
+                      </a:r>
+                    </a:p>
+                  </a:txBody>
+                  <a:tcPr anchor="ctr" marL="109728" marR="91440" marT="36576" marB="36576">
+                    <a:solidFill>
+                      <a:srgbClr val="FFFFFF"/>
+                    </a:solidFill>
+                  </a:tcPr>
+                </a:tc>
+                <a:tc>
+                  <a:txBody>
+                    <a:bodyPr/>
+                    <a:lstStyle/>
+                    <a:p>
+                      <a:pPr algn="l"/>
+                      <a:r>
+                        <a:rPr sz="1100" b="1" i="0">
+                          <a:solidFill>
+                            <a:srgbClr val="2B2B2B"/>
+                          </a:solidFill>
+                          <a:latin typeface="Calibri"/>
+                        </a:rPr>
+                        <a:t>Autoevaluación</a:t>
+                      </a:r>
+                      <a:r>
+                        <a:rPr sz="1100" b="0" i="0">
+                          <a:solidFill>
+                            <a:srgbClr val="2B2B2B"/>
+                          </a:solidFill>
+                          <a:latin typeface="Calibri"/>
+                        </a:rPr>
+                        <a:t> · Cuestionario · 1,6%</a:t>
+                      </a:r>
+                    </a:p>
+                  </a:txBody>
+                  <a:tcPr anchor="ctr" marL="109728" marR="91440" marT="36576" marB="36576">
+                    <a:solidFill>
+                      <a:srgbClr val="FFFFFF"/>
+                    </a:solidFill>
+                  </a:tcPr>
+                </a:tc>
+                <a:tc>
+                  <a:txBody>
+                    <a:bodyPr/>
+                    <a:lstStyle/>
+                    <a:p>
+                      <a:pPr algn="l"/>
+                      <a:r>
+                        <a:rPr sz="1100" b="0" i="0">
+                          <a:solidFill>
+                            <a:srgbClr val="2B2B2B"/>
+                          </a:solidFill>
+                          <a:latin typeface="Calibri"/>
+                        </a:rPr>
+                        <a:t>Diligénciala tú, de forma </a:t>
+                      </a:r>
+                      <a:r>
+                        <a:rPr sz="1100" b="1" i="0">
+                          <a:solidFill>
+                            <a:srgbClr val="2B2B2B"/>
+                          </a:solidFill>
+                          <a:latin typeface="Calibri"/>
+                        </a:rPr>
+                        <a:t>individual</a:t>
+                      </a:r>
+                      <a:r>
+                        <a:rPr sz="1100" b="0" i="0">
+                          <a:solidFill>
+                            <a:srgbClr val="2B2B2B"/>
+                          </a:solidFill>
+                          <a:latin typeface="Calibri"/>
+                        </a:rPr>
+                        <a:t>, valorando tu participación real.</a:t>
+                      </a:r>
+                    </a:p>
+                  </a:txBody>
+                  <a:tcPr anchor="ctr" marL="109728" marR="91440" marT="36576" marB="36576">
+                    <a:solidFill>
+                      <a:srgbClr val="FFFFFF"/>
+                    </a:solidFill>
+                  </a:tcPr>
+                </a:tc>
+              </a:tr>
+              <a:tr h="477520">
+                <a:tc>
+                  <a:txBody>
+                    <a:bodyPr/>
+                    <a:lstStyle/>
+                    <a:p>
+                      <a:pPr algn="l"/>
+                      <a:r>
+                        <a:rPr sz="1100" b="1" i="0">
+                          <a:solidFill>
+                            <a:srgbClr val="2B2B2B"/>
+                          </a:solidFill>
+                          <a:latin typeface="Calibri"/>
+                        </a:rPr>
+                        <a:t>Sesión 11</a:t>
+                      </a:r>
+                      <a:r>
+                        <a:rPr sz="1100" b="0" i="0">
+                          <a:solidFill>
+                            <a:srgbClr val="2B2B2B"/>
+                          </a:solidFill>
+                          <a:latin typeface="Calibri"/>
+                        </a:rPr>
+                        <a:t> · cierra esta semana</a:t>
+                      </a:r>
+                    </a:p>
+                  </a:txBody>
+                  <a:tcPr anchor="ctr" marL="109728" marR="91440" marT="36576" marB="36576">
+                    <a:solidFill>
+                      <a:srgbClr val="F2F2F2"/>
+                    </a:solidFill>
+                  </a:tcPr>
+                </a:tc>
+                <a:tc>
+                  <a:txBody>
+                    <a:bodyPr/>
+                    <a:lstStyle/>
+                    <a:p>
+                      <a:pPr algn="l"/>
+                      <a:r>
+                        <a:rPr sz="1100" b="1" i="0">
+                          <a:solidFill>
+                            <a:srgbClr val="2B2B2B"/>
+                          </a:solidFill>
+                          <a:latin typeface="Calibri"/>
+                        </a:rPr>
+                        <a:t>Coevaluación</a:t>
+                      </a:r>
+                      <a:r>
+                        <a:rPr sz="1100" b="0" i="0">
+                          <a:solidFill>
+                            <a:srgbClr val="2B2B2B"/>
+                          </a:solidFill>
+                          <a:latin typeface="Calibri"/>
+                        </a:rPr>
+                        <a:t> · Foro · 1,6%</a:t>
+                      </a:r>
+                    </a:p>
+                  </a:txBody>
+                  <a:tcPr anchor="ctr" marL="109728" marR="91440" marT="36576" marB="36576">
+                    <a:solidFill>
+                      <a:srgbClr val="F2F2F2"/>
+                    </a:solidFill>
+                  </a:tcPr>
+                </a:tc>
+                <a:tc>
+                  <a:txBody>
+                    <a:bodyPr/>
+                    <a:lstStyle/>
+                    <a:p>
+                      <a:pPr algn="l"/>
+                      <a:r>
+                        <a:rPr sz="1100" b="1" i="0">
+                          <a:solidFill>
+                            <a:srgbClr val="2B2B2B"/>
+                          </a:solidFill>
+                          <a:latin typeface="Calibri"/>
+                        </a:rPr>
+                        <a:t>Publica</a:t>
+                      </a:r>
+                      <a:r>
+                        <a:rPr sz="1100" b="0" i="0">
+                          <a:solidFill>
+                            <a:srgbClr val="2B2B2B"/>
+                          </a:solidFill>
+                          <a:latin typeface="Calibri"/>
+                        </a:rPr>
+                        <a:t> tu aporte: valora hechos del trabajo del equipo, nunca a las personas.</a:t>
+                      </a:r>
+                    </a:p>
+                  </a:txBody>
+                  <a:tcPr anchor="ctr" marL="109728" marR="91440" marT="36576" marB="36576">
+                    <a:solidFill>
+                      <a:srgbClr val="F2F2F2"/>
+                    </a:solidFill>
+                  </a:tcPr>
+                </a:tc>
+              </a:tr>
+            </a:tbl>
+          </a:graphicData>
+        </a:graphic>
+      </p:graphicFrame>
+      <p:sp>
+        <p:nvSpPr>
+          <p:cNvPr id="6" name="TextBox 5"/>
+          <p:cNvSpPr txBox="1"/>
+          <p:nvPr/>
+        </p:nvSpPr>
+        <p:spPr>
+          <a:xfrm>
+            <a:off x="640080" y="6080760"/>
+            <a:ext cx="10911535" cy="548640"/>
+          </a:xfrm>
+          <a:prstGeom prst="rect">
+            <a:avLst/>
+          </a:prstGeom>
+          <a:noFill/>
+        </p:spPr>
+        <p:txBody>
+          <a:bodyPr wrap="square" anchor="t" lIns="0" rIns="0" tIns="0" bIns="0">
+            <a:spAutoFit/>
+          </a:bodyPr>
+          <a:lstStyle/>
+          <a:p>
+            <a:r>
+              <a:rPr sz="1200" b="0" i="1">
+                <a:solidFill>
+                  <a:srgbClr val="2B2B2B"/>
+                </a:solidFill>
+                <a:latin typeface="Calibri"/>
+              </a:rPr>
+              <a:t>Esta misma tabla va al final de todas las sesiones. La </a:t>
+            </a:r>
+            <a:r>
+              <a:rPr sz="1200" b="1" i="1">
+                <a:solidFill>
+                  <a:srgbClr val="2B2B2B"/>
+                </a:solidFill>
+                <a:latin typeface="Calibri"/>
+              </a:rPr>
+              <a:t>fecha</a:t>
+            </a:r>
+            <a:r>
+              <a:rPr sz="1200" b="0" i="1">
+                <a:solidFill>
+                  <a:srgbClr val="2B2B2B"/>
+                </a:solidFill>
+                <a:latin typeface="Calibri"/>
+              </a:rPr>
+              <a:t> de cada ventana está en el enunciado del ítem (`Clases/Recursos/ACAs/`) y en el aula: si el aula y cualquier otro material se contradicen, </a:t>
+            </a:r>
+            <a:r>
+              <a:rPr sz="1200" b="1" i="1">
+                <a:solidFill>
+                  <a:srgbClr val="2B2B2B"/>
+                </a:solidFill>
+                <a:latin typeface="Calibri"/>
+              </a:rPr>
+              <a:t>manda el aula</a:t>
+            </a:r>
+            <a:r>
+              <a:rPr sz="1200" b="0" i="1">
+                <a:solidFill>
+                  <a:srgbClr val="2B2B2B"/>
+                </a:solidFill>
+                <a:latin typeface="Calibri"/>
+              </a:rPr>
+              <a:t>.</a:t>
+            </a:r>
+          </a:p>
+        </p:txBody>
+      </p:sp>
+      <p:sp>
+        <p:nvSpPr>
+          <p:cNvPr id="7" name="TextBox 6"/>
+          <p:cNvSpPr txBox="1"/>
+          <p:nvPr/>
+        </p:nvSpPr>
+        <p:spPr>
+          <a:xfrm>
+            <a:off x="11094415" y="6446520"/>
+            <a:ext cx="548640" cy="274320"/>
+          </a:xfrm>
+          <a:prstGeom prst="rect">
+            <a:avLst/>
+          </a:prstGeom>
+          <a:noFill/>
+        </p:spPr>
+        <p:txBody>
+          <a:bodyPr wrap="square" anchor="t" lIns="0" rIns="0" tIns="0" bIns="0">
+            <a:spAutoFit/>
+          </a:bodyPr>
+          <a:lstStyle/>
+          <a:p>
+            <a:pPr algn="r"/>
+            <a:r>
+              <a:rPr sz="1000" b="1" i="0">
+                <a:solidFill>
+                  <a:srgbClr val="8F989D"/>
+                </a:solidFill>
+                <a:latin typeface="Calibri"/>
+              </a:rPr>
+              <a:t>20</a:t>
+            </a:r>
+          </a:p>
+        </p:txBody>
+      </p:sp>
+    </p:spTree>
+  </p:cSld>
+  <p:clrMapOvr>
+    <a:masterClrMapping/>
+  </p:clrMapOvr>
+</p:sld>
+</file>
+
+<file path=ppt/slides/slide21.xml><?xml version="1.0" encoding="utf-8"?>
 <p:sld xmlns:a="http://schemas.openxmlformats.org/drawingml/2006/main" xmlns:p="http://schemas.openxmlformats.org/presentationml/2006/main" xmlns:r="http://schemas.openxmlformats.org/officeDocument/2006/relationships">
   <p:cSld>
     <p:bg>
@@ -7171,423 +9237,6 @@
                 <a:latin typeface="Calibri"/>
               </a:rPr>
               <a:t>TRABAJO DE GRADO 2</a:t>
-            </a:r>
-          </a:p>
-        </p:txBody>
-      </p:sp>
-    </p:spTree>
-  </p:cSld>
-  <p:clrMapOvr>
-    <a:masterClrMapping/>
-  </p:clrMapOvr>
-</p:sld>
-</file>
-
-<file path=ppt/slides/slide2.xml><?xml version="1.0" encoding="utf-8"?>
-<p:sld xmlns:a="http://schemas.openxmlformats.org/drawingml/2006/main" xmlns:p="http://schemas.openxmlformats.org/presentationml/2006/main" xmlns:r="http://schemas.openxmlformats.org/officeDocument/2006/relationships">
-  <p:cSld>
-    <p:bg>
-      <p:bgPr>
-        <a:solidFill>
-          <a:srgbClr val="FFFFFF"/>
-        </a:solidFill>
-        <a:effectLst/>
-      </p:bgPr>
-    </p:bg>
-    <p:spTree>
-      <p:nvGrpSpPr>
-        <p:cNvPr id="1" name=""/>
-        <p:cNvGrpSpPr/>
-        <p:nvPr/>
-      </p:nvGrpSpPr>
-      <p:grpSpPr/>
-      <p:sp>
-        <p:nvSpPr>
-          <p:cNvPr id="2" name="Rectangle 1"/>
-          <p:cNvSpPr/>
-          <p:nvPr/>
-        </p:nvSpPr>
-        <p:spPr>
-          <a:xfrm>
-            <a:off x="0" y="0"/>
-            <a:ext cx="12191695" cy="1188720"/>
-          </a:xfrm>
-          <a:prstGeom prst="rect">
-            <a:avLst/>
-          </a:prstGeom>
-          <a:solidFill>
-            <a:srgbClr val="0C2340"/>
-          </a:solidFill>
-          <a:ln>
-            <a:noFill/>
-          </a:ln>
-          <a:effectLst/>
-        </p:spPr>
-        <p:style>
-          <a:lnRef idx="1">
-            <a:schemeClr val="accent1"/>
-          </a:lnRef>
-          <a:fillRef idx="3">
-            <a:schemeClr val="accent1"/>
-          </a:fillRef>
-          <a:effectRef idx="2">
-            <a:schemeClr val="accent1"/>
-          </a:effectRef>
-          <a:fontRef idx="minor">
-            <a:schemeClr val="lt1"/>
-          </a:fontRef>
-        </p:style>
-        <p:txBody>
-          <a:bodyPr rtlCol="0" anchor="ctr"/>
-          <a:lstStyle/>
-          <a:p>
-            <a:pPr algn="ctr"/>
-          </a:p>
-        </p:txBody>
-      </p:sp>
-      <p:sp>
-        <p:nvSpPr>
-          <p:cNvPr id="3" name="TextBox 2"/>
-          <p:cNvSpPr txBox="1"/>
-          <p:nvPr/>
-        </p:nvSpPr>
-        <p:spPr>
-          <a:xfrm>
-            <a:off x="640080" y="0"/>
-            <a:ext cx="9082735" cy="1188720"/>
-          </a:xfrm>
-          <a:prstGeom prst="rect">
-            <a:avLst/>
-          </a:prstGeom>
-          <a:noFill/>
-        </p:spPr>
-        <p:txBody>
-          <a:bodyPr wrap="square" anchor="ctr" lIns="0" rIns="0" tIns="0" bIns="0">
-            <a:spAutoFit/>
-          </a:bodyPr>
-          <a:lstStyle/>
-          <a:p>
-            <a:pPr algn="ctr"/>
-            <a:r>
-              <a:rPr sz="2600" b="1" i="0">
-                <a:solidFill>
-                  <a:srgbClr val="FFFFFF"/>
-                </a:solidFill>
-                <a:latin typeface="Calibri"/>
-              </a:rPr>
-              <a:t>Cerrar TG2 no es terminar el trabajo de grado</a:t>
-            </a:r>
-          </a:p>
-        </p:txBody>
-      </p:sp>
-      <p:sp>
-        <p:nvSpPr>
-          <p:cNvPr id="4" name="TextBox 3"/>
-          <p:cNvSpPr txBox="1"/>
-          <p:nvPr/>
-        </p:nvSpPr>
-        <p:spPr>
-          <a:xfrm>
-            <a:off x="640080" y="1691639"/>
-            <a:ext cx="10911535" cy="4617720"/>
-          </a:xfrm>
-          <a:prstGeom prst="rect">
-            <a:avLst/>
-          </a:prstGeom>
-          <a:noFill/>
-        </p:spPr>
-        <p:txBody>
-          <a:bodyPr wrap="square" anchor="t" lIns="0" rIns="0" tIns="0" bIns="0">
-            <a:spAutoFit/>
-          </a:bodyPr>
-          <a:lstStyle/>
-          <a:p>
-            <a:pPr>
-              <a:spcAft>
-                <a:spcPts val="1000"/>
-              </a:spcAft>
-            </a:pPr>
-            <a:r>
-              <a:rPr sz="1600" b="0" i="0">
-                <a:solidFill>
-                  <a:srgbClr val="2B2B2B"/>
-                </a:solidFill>
-                <a:latin typeface="Calibri"/>
-              </a:rPr>
-              <a:t>–   Última sesión sincrónica del curso. Conviene aclarar de entrada qué significa 'cerrar'.</a:t>
-            </a:r>
-          </a:p>
-          <a:p>
-            <a:pPr>
-              <a:spcAft>
-                <a:spcPts val="1000"/>
-              </a:spcAft>
-            </a:pPr>
-            <a:r>
-              <a:rPr sz="1600" b="0" i="0">
-                <a:solidFill>
-                  <a:srgbClr val="2B2B2B"/>
-                </a:solidFill>
-                <a:latin typeface="Calibri"/>
-              </a:rPr>
-              <a:t>–   </a:t>
-            </a:r>
-            <a:r>
-              <a:rPr sz="1600" b="1" i="0">
-                <a:solidFill>
-                  <a:srgbClr val="2B2B2B"/>
-                </a:solidFill>
-                <a:latin typeface="Calibri"/>
-              </a:rPr>
-              <a:t>Cerrar TG2 es</a:t>
-            </a:r>
-            <a:r>
-              <a:rPr sz="1600" b="0" i="0">
-                <a:solidFill>
-                  <a:srgbClr val="2B2B2B"/>
-                </a:solidFill>
-                <a:latin typeface="Calibri"/>
-              </a:rPr>
-              <a:t> dejar un avance </a:t>
-            </a:r>
-            <a:r>
-              <a:rPr sz="1600" b="1" i="0">
-                <a:solidFill>
-                  <a:srgbClr val="2B2B2B"/>
-                </a:solidFill>
-                <a:latin typeface="Calibri"/>
-              </a:rPr>
-              <a:t>limpio y coherente</a:t>
-            </a:r>
-            <a:r>
-              <a:rPr sz="1600" b="0" i="0">
-                <a:solidFill>
-                  <a:srgbClr val="2B2B2B"/>
-                </a:solidFill>
-                <a:latin typeface="Calibri"/>
-              </a:rPr>
-              <a:t>: planteamiento, pregunta, objetivos, marco y metodología propuesta.</a:t>
-            </a:r>
-          </a:p>
-          <a:p>
-            <a:pPr>
-              <a:spcAft>
-                <a:spcPts val="1000"/>
-              </a:spcAft>
-            </a:pPr>
-            <a:r>
-              <a:rPr sz="1600" b="0" i="0">
-                <a:solidFill>
-                  <a:srgbClr val="2B2B2B"/>
-                </a:solidFill>
-                <a:latin typeface="Calibri"/>
-              </a:rPr>
-              <a:t>–   </a:t>
-            </a:r>
-            <a:r>
-              <a:rPr sz="1600" b="1" i="0">
-                <a:solidFill>
-                  <a:srgbClr val="2B2B2B"/>
-                </a:solidFill>
-                <a:latin typeface="Calibri"/>
-              </a:rPr>
-              <a:t>Cerrar TG2 no es</a:t>
-            </a:r>
-            <a:r>
-              <a:rPr sz="1600" b="0" i="0">
-                <a:solidFill>
-                  <a:srgbClr val="2B2B2B"/>
-                </a:solidFill>
-                <a:latin typeface="Calibri"/>
-              </a:rPr>
-              <a:t> haber terminado el trabajo de grado: faltan aplicar los instrumentos, recoger datos, analizarlos, escribir resultados y sustentar.</a:t>
-            </a:r>
-          </a:p>
-          <a:p>
-            <a:pPr lvl="1">
-              <a:spcAft>
-                <a:spcPts val="600"/>
-              </a:spcAft>
-            </a:pPr>
-            <a:r>
-              <a:rPr sz="1500" b="0" i="0">
-                <a:solidFill>
-                  <a:srgbClr val="2B2B2B"/>
-                </a:solidFill>
-                <a:latin typeface="Calibri"/>
-              </a:rPr>
-              <a:t>●   Todo eso es TG3, y llega en el próximo periodo. Hoy se prepara el terreno para que allá solo haya que ejecutar.</a:t>
-            </a:r>
-          </a:p>
-          <a:p>
-            <a:pPr>
-              <a:spcAft>
-                <a:spcPts val="1000"/>
-              </a:spcAft>
-            </a:pPr>
-            <a:r>
-              <a:rPr sz="1600" b="0" i="0">
-                <a:solidFill>
-                  <a:srgbClr val="2B2B2B"/>
-                </a:solidFill>
-                <a:latin typeface="Calibri"/>
-              </a:rPr>
-              <a:t>–   Piénselo así: usted entrega un documento que </a:t>
-            </a:r>
-            <a:r>
-              <a:rPr sz="1600" b="1" i="0">
-                <a:solidFill>
-                  <a:srgbClr val="2B2B2B"/>
-                </a:solidFill>
-                <a:latin typeface="Calibri"/>
-              </a:rPr>
-              <a:t>cualquier otra persona podría continuar</a:t>
-            </a:r>
-            <a:r>
-              <a:rPr sz="1600" b="0" i="0">
-                <a:solidFill>
-                  <a:srgbClr val="2B2B2B"/>
-                </a:solidFill>
-                <a:latin typeface="Calibri"/>
-              </a:rPr>
-              <a:t> sin llamarlo.</a:t>
-            </a:r>
-          </a:p>
-          <a:p>
-            <a:pPr lvl="1">
-              <a:spcAft>
-                <a:spcPts val="600"/>
-              </a:spcAft>
-            </a:pPr>
-            <a:r>
-              <a:rPr sz="1500" b="0" i="0">
-                <a:solidFill>
-                  <a:srgbClr val="2B2B2B"/>
-                </a:solidFill>
-                <a:latin typeface="Calibri"/>
-              </a:rPr>
-              <a:t>●   Ese es el estándar real de un avance bien cerrado.</a:t>
-            </a:r>
-          </a:p>
-          <a:p>
-            <a:pPr>
-              <a:spcAft>
-                <a:spcPts val="1000"/>
-              </a:spcAft>
-            </a:pPr>
-            <a:r>
-              <a:rPr sz="1600" b="0" i="0">
-                <a:solidFill>
-                  <a:srgbClr val="2B2B2B"/>
-                </a:solidFill>
-                <a:latin typeface="Calibri"/>
-              </a:rPr>
-              <a:t>–   Dos productos hoy: la </a:t>
-            </a:r>
-            <a:r>
-              <a:rPr sz="1600" b="1" i="0">
-                <a:solidFill>
-                  <a:srgbClr val="2B2B2B"/>
-                </a:solidFill>
-                <a:latin typeface="Calibri"/>
-              </a:rPr>
-              <a:t>versión limpia</a:t>
-            </a:r>
-            <a:r>
-              <a:rPr sz="1600" b="0" i="0">
-                <a:solidFill>
-                  <a:srgbClr val="2B2B2B"/>
-                </a:solidFill>
-                <a:latin typeface="Calibri"/>
-              </a:rPr>
-              <a:t> del documento y la </a:t>
-            </a:r>
-            <a:r>
-              <a:rPr sz="1600" b="1" i="0">
-                <a:solidFill>
-                  <a:srgbClr val="2B2B2B"/>
-                </a:solidFill>
-                <a:latin typeface="Calibri"/>
-              </a:rPr>
-              <a:t>lista de pendientes para TG3</a:t>
-            </a:r>
-            <a:r>
-              <a:rPr sz="1600" b="0" i="0">
-                <a:solidFill>
-                  <a:srgbClr val="2B2B2B"/>
-                </a:solidFill>
-                <a:latin typeface="Calibri"/>
-              </a:rPr>
-              <a:t>.</a:t>
-            </a:r>
-          </a:p>
-        </p:txBody>
-      </p:sp>
-      <p:sp>
-        <p:nvSpPr>
-          <p:cNvPr id="5" name="TextBox 4"/>
-          <p:cNvSpPr txBox="1"/>
-          <p:nvPr/>
-        </p:nvSpPr>
-        <p:spPr>
-          <a:xfrm>
-            <a:off x="11094415" y="6446520"/>
-            <a:ext cx="548640" cy="274320"/>
-          </a:xfrm>
-          <a:prstGeom prst="rect">
-            <a:avLst/>
-          </a:prstGeom>
-          <a:noFill/>
-        </p:spPr>
-        <p:txBody>
-          <a:bodyPr wrap="square" anchor="t" lIns="0" rIns="0" tIns="0" bIns="0">
-            <a:spAutoFit/>
-          </a:bodyPr>
-          <a:lstStyle/>
-          <a:p>
-            <a:pPr algn="r"/>
-            <a:r>
-              <a:rPr sz="1000" b="1" i="0">
-                <a:solidFill>
-                  <a:srgbClr val="8F989D"/>
-                </a:solidFill>
-                <a:latin typeface="Calibri"/>
-              </a:rPr>
-              <a:t>2</a:t>
-            </a:r>
-          </a:p>
-        </p:txBody>
-      </p:sp>
-      <p:sp>
-        <p:nvSpPr>
-          <p:cNvPr id="6" name="TextBox 5"/>
-          <p:cNvSpPr txBox="1"/>
-          <p:nvPr/>
-        </p:nvSpPr>
-        <p:spPr>
-          <a:xfrm>
-            <a:off x="640080" y="5943600"/>
-            <a:ext cx="9997135" cy="457200"/>
-          </a:xfrm>
-          <a:prstGeom prst="rect">
-            <a:avLst/>
-          </a:prstGeom>
-          <a:noFill/>
-        </p:spPr>
-        <p:txBody>
-          <a:bodyPr wrap="square" anchor="t" lIns="0" rIns="0" tIns="0" bIns="0">
-            <a:spAutoFit/>
-          </a:bodyPr>
-          <a:lstStyle/>
-          <a:p>
-            <a:r>
-              <a:rPr sz="1200" b="0" i="1">
-                <a:solidFill>
-                  <a:srgbClr val="2B2B2B"/>
-                </a:solidFill>
-                <a:latin typeface="Calibri"/>
-              </a:rPr>
-              <a:t>Salida esperada: checklist de cierre recorrido, documento con formato de la Plantilla APA CUN y pendientes escritos en imperativo.</a:t>
             </a:r>
           </a:p>
         </p:txBody>
